--- a/Meeting Notes/Introduction.pptx
+++ b/Meeting Notes/Introduction.pptx
@@ -4,21 +4,22 @@
   <p:sldMasterIdLst>
     <p:sldMasterId id="2147483696" r:id="rId1"/>
   </p:sldMasterIdLst>
+  <p:notesMasterIdLst>
+    <p:notesMasterId r:id="rId14"/>
+  </p:notesMasterIdLst>
   <p:sldIdLst>
     <p:sldId id="256" r:id="rId2"/>
     <p:sldId id="257" r:id="rId3"/>
     <p:sldId id="258" r:id="rId4"/>
-    <p:sldId id="259" r:id="rId5"/>
-    <p:sldId id="260" r:id="rId6"/>
-    <p:sldId id="261" r:id="rId7"/>
-    <p:sldId id="262" r:id="rId8"/>
-    <p:sldId id="263" r:id="rId9"/>
-    <p:sldId id="264" r:id="rId10"/>
-    <p:sldId id="265" r:id="rId11"/>
-    <p:sldId id="266" r:id="rId12"/>
-    <p:sldId id="267" r:id="rId13"/>
-    <p:sldId id="268" r:id="rId14"/>
-    <p:sldId id="269" r:id="rId15"/>
+    <p:sldId id="272" r:id="rId5"/>
+    <p:sldId id="271" r:id="rId6"/>
+    <p:sldId id="273" r:id="rId7"/>
+    <p:sldId id="260" r:id="rId8"/>
+    <p:sldId id="274" r:id="rId9"/>
+    <p:sldId id="276" r:id="rId10"/>
+    <p:sldId id="277" r:id="rId11"/>
+    <p:sldId id="279" r:id="rId12"/>
+    <p:sldId id="280" r:id="rId13"/>
   </p:sldIdLst>
   <p:sldSz cx="12192000" cy="6858000"/>
   <p:notesSz cx="6858000" cy="9144000"/>
@@ -125,6 +126,608 @@
 </p:presentation>
 </file>
 
+<file path=ppt/notesMasters/notesMaster1.xml><?xml version="1.0" encoding="utf-8"?>
+<p:notesMaster xmlns:a="http://schemas.openxmlformats.org/drawingml/2006/main" xmlns:r="http://schemas.openxmlformats.org/officeDocument/2006/relationships" xmlns:p="http://schemas.openxmlformats.org/presentationml/2006/main">
+  <p:cSld>
+    <p:bg>
+      <p:bgRef idx="1001">
+        <a:schemeClr val="bg1"/>
+      </p:bgRef>
+    </p:bg>
+    <p:spTree>
+      <p:nvGrpSpPr>
+        <p:cNvPr id="1" name=""/>
+        <p:cNvGrpSpPr/>
+        <p:nvPr/>
+      </p:nvGrpSpPr>
+      <p:grpSpPr>
+        <a:xfrm>
+          <a:off x="0" y="0"/>
+          <a:ext cx="0" cy="0"/>
+          <a:chOff x="0" y="0"/>
+          <a:chExt cx="0" cy="0"/>
+        </a:xfrm>
+      </p:grpSpPr>
+      <p:sp>
+        <p:nvSpPr>
+          <p:cNvPr id="2" name="Header Placeholder 1"/>
+          <p:cNvSpPr>
+            <a:spLocks noGrp="1"/>
+          </p:cNvSpPr>
+          <p:nvPr>
+            <p:ph type="hdr" sz="quarter"/>
+          </p:nvPr>
+        </p:nvSpPr>
+        <p:spPr>
+          <a:xfrm>
+            <a:off x="0" y="0"/>
+            <a:ext cx="2971800" cy="458788"/>
+          </a:xfrm>
+          <a:prstGeom prst="rect">
+            <a:avLst/>
+          </a:prstGeom>
+        </p:spPr>
+        <p:txBody>
+          <a:bodyPr vert="horz" lIns="91440" tIns="45720" rIns="91440" bIns="45720" rtlCol="0"/>
+          <a:lstStyle>
+            <a:lvl1pPr algn="l">
+              <a:defRPr sz="1200"/>
+            </a:lvl1pPr>
+          </a:lstStyle>
+          <a:p>
+            <a:endParaRPr lang="en-US"/>
+          </a:p>
+        </p:txBody>
+      </p:sp>
+      <p:sp>
+        <p:nvSpPr>
+          <p:cNvPr id="3" name="Date Placeholder 2"/>
+          <p:cNvSpPr>
+            <a:spLocks noGrp="1"/>
+          </p:cNvSpPr>
+          <p:nvPr>
+            <p:ph type="dt" idx="1"/>
+          </p:nvPr>
+        </p:nvSpPr>
+        <p:spPr>
+          <a:xfrm>
+            <a:off x="3884613" y="0"/>
+            <a:ext cx="2971800" cy="458788"/>
+          </a:xfrm>
+          <a:prstGeom prst="rect">
+            <a:avLst/>
+          </a:prstGeom>
+        </p:spPr>
+        <p:txBody>
+          <a:bodyPr vert="horz" lIns="91440" tIns="45720" rIns="91440" bIns="45720" rtlCol="0"/>
+          <a:lstStyle>
+            <a:lvl1pPr algn="r">
+              <a:defRPr sz="1200"/>
+            </a:lvl1pPr>
+          </a:lstStyle>
+          <a:p>
+            <a:fld id="{A9AE503A-04EF-C444-82D1-8701D51E733D}" type="datetimeFigureOut">
+              <a:rPr lang="en-US" smtClean="0"/>
+              <a:t>1/16/26</a:t>
+            </a:fld>
+            <a:endParaRPr lang="en-US"/>
+          </a:p>
+        </p:txBody>
+      </p:sp>
+      <p:sp>
+        <p:nvSpPr>
+          <p:cNvPr id="4" name="Slide Image Placeholder 3"/>
+          <p:cNvSpPr>
+            <a:spLocks noGrp="1" noRot="1" noChangeAspect="1"/>
+          </p:cNvSpPr>
+          <p:nvPr>
+            <p:ph type="sldImg" idx="2"/>
+          </p:nvPr>
+        </p:nvSpPr>
+        <p:spPr>
+          <a:xfrm>
+            <a:off x="685800" y="1143000"/>
+            <a:ext cx="5486400" cy="3086100"/>
+          </a:xfrm>
+          <a:prstGeom prst="rect">
+            <a:avLst/>
+          </a:prstGeom>
+          <a:noFill/>
+          <a:ln w="12700">
+            <a:solidFill>
+              <a:prstClr val="black"/>
+            </a:solidFill>
+          </a:ln>
+        </p:spPr>
+        <p:txBody>
+          <a:bodyPr vert="horz" lIns="91440" tIns="45720" rIns="91440" bIns="45720" rtlCol="0" anchor="ctr"/>
+          <a:lstStyle/>
+          <a:p>
+            <a:endParaRPr lang="en-US"/>
+          </a:p>
+        </p:txBody>
+      </p:sp>
+      <p:sp>
+        <p:nvSpPr>
+          <p:cNvPr id="5" name="Notes Placeholder 4"/>
+          <p:cNvSpPr>
+            <a:spLocks noGrp="1"/>
+          </p:cNvSpPr>
+          <p:nvPr>
+            <p:ph type="body" sz="quarter" idx="3"/>
+          </p:nvPr>
+        </p:nvSpPr>
+        <p:spPr>
+          <a:xfrm>
+            <a:off x="685800" y="4400550"/>
+            <a:ext cx="5486400" cy="3600450"/>
+          </a:xfrm>
+          <a:prstGeom prst="rect">
+            <a:avLst/>
+          </a:prstGeom>
+        </p:spPr>
+        <p:txBody>
+          <a:bodyPr vert="horz" lIns="91440" tIns="45720" rIns="91440" bIns="45720" rtlCol="0"/>
+          <a:lstStyle/>
+          <a:p>
+            <a:pPr lvl="0"/>
+            <a:r>
+              <a:rPr lang="en-US"/>
+              <a:t>Click to edit Master text styles</a:t>
+            </a:r>
+          </a:p>
+          <a:p>
+            <a:pPr lvl="1"/>
+            <a:r>
+              <a:rPr lang="en-US"/>
+              <a:t>Second level</a:t>
+            </a:r>
+          </a:p>
+          <a:p>
+            <a:pPr lvl="2"/>
+            <a:r>
+              <a:rPr lang="en-US"/>
+              <a:t>Third level</a:t>
+            </a:r>
+          </a:p>
+          <a:p>
+            <a:pPr lvl="3"/>
+            <a:r>
+              <a:rPr lang="en-US"/>
+              <a:t>Fourth level</a:t>
+            </a:r>
+          </a:p>
+          <a:p>
+            <a:pPr lvl="4"/>
+            <a:r>
+              <a:rPr lang="en-US"/>
+              <a:t>Fifth level</a:t>
+            </a:r>
+          </a:p>
+        </p:txBody>
+      </p:sp>
+      <p:sp>
+        <p:nvSpPr>
+          <p:cNvPr id="6" name="Footer Placeholder 5"/>
+          <p:cNvSpPr>
+            <a:spLocks noGrp="1"/>
+          </p:cNvSpPr>
+          <p:nvPr>
+            <p:ph type="ftr" sz="quarter" idx="4"/>
+          </p:nvPr>
+        </p:nvSpPr>
+        <p:spPr>
+          <a:xfrm>
+            <a:off x="0" y="8685213"/>
+            <a:ext cx="2971800" cy="458787"/>
+          </a:xfrm>
+          <a:prstGeom prst="rect">
+            <a:avLst/>
+          </a:prstGeom>
+        </p:spPr>
+        <p:txBody>
+          <a:bodyPr vert="horz" lIns="91440" tIns="45720" rIns="91440" bIns="45720" rtlCol="0" anchor="b"/>
+          <a:lstStyle>
+            <a:lvl1pPr algn="l">
+              <a:defRPr sz="1200"/>
+            </a:lvl1pPr>
+          </a:lstStyle>
+          <a:p>
+            <a:endParaRPr lang="en-US"/>
+          </a:p>
+        </p:txBody>
+      </p:sp>
+      <p:sp>
+        <p:nvSpPr>
+          <p:cNvPr id="7" name="Slide Number Placeholder 6"/>
+          <p:cNvSpPr>
+            <a:spLocks noGrp="1"/>
+          </p:cNvSpPr>
+          <p:nvPr>
+            <p:ph type="sldNum" sz="quarter" idx="5"/>
+          </p:nvPr>
+        </p:nvSpPr>
+        <p:spPr>
+          <a:xfrm>
+            <a:off x="3884613" y="8685213"/>
+            <a:ext cx="2971800" cy="458787"/>
+          </a:xfrm>
+          <a:prstGeom prst="rect">
+            <a:avLst/>
+          </a:prstGeom>
+        </p:spPr>
+        <p:txBody>
+          <a:bodyPr vert="horz" lIns="91440" tIns="45720" rIns="91440" bIns="45720" rtlCol="0" anchor="b"/>
+          <a:lstStyle>
+            <a:lvl1pPr algn="r">
+              <a:defRPr sz="1200"/>
+            </a:lvl1pPr>
+          </a:lstStyle>
+          <a:p>
+            <a:fld id="{67214DAA-C5EC-DA41-9E6B-E06EDAF0EB4F}" type="slidenum">
+              <a:rPr lang="en-US" smtClean="0"/>
+              <a:t>‹#›</a:t>
+            </a:fld>
+            <a:endParaRPr lang="en-US"/>
+          </a:p>
+        </p:txBody>
+      </p:sp>
+    </p:spTree>
+    <p:extLst>
+      <p:ext uri="{BB962C8B-B14F-4D97-AF65-F5344CB8AC3E}">
+        <p14:creationId xmlns:p14="http://schemas.microsoft.com/office/powerpoint/2010/main" val="1809811606"/>
+      </p:ext>
+    </p:extLst>
+  </p:cSld>
+  <p:clrMap bg1="lt1" tx1="dk1" bg2="lt2" tx2="dk2" accent1="accent1" accent2="accent2" accent3="accent3" accent4="accent4" accent5="accent5" accent6="accent6" hlink="hlink" folHlink="folHlink"/>
+  <p:notesStyle>
+    <a:lvl1pPr marL="0" algn="l" defTabSz="914400" rtl="0" eaLnBrk="1" latinLnBrk="0" hangingPunct="1">
+      <a:defRPr sz="1200" kern="1200">
+        <a:solidFill>
+          <a:schemeClr val="tx1"/>
+        </a:solidFill>
+        <a:latin typeface="+mn-lt"/>
+        <a:ea typeface="+mn-ea"/>
+        <a:cs typeface="+mn-cs"/>
+      </a:defRPr>
+    </a:lvl1pPr>
+    <a:lvl2pPr marL="457200" algn="l" defTabSz="914400" rtl="0" eaLnBrk="1" latinLnBrk="0" hangingPunct="1">
+      <a:defRPr sz="1200" kern="1200">
+        <a:solidFill>
+          <a:schemeClr val="tx1"/>
+        </a:solidFill>
+        <a:latin typeface="+mn-lt"/>
+        <a:ea typeface="+mn-ea"/>
+        <a:cs typeface="+mn-cs"/>
+      </a:defRPr>
+    </a:lvl2pPr>
+    <a:lvl3pPr marL="914400" algn="l" defTabSz="914400" rtl="0" eaLnBrk="1" latinLnBrk="0" hangingPunct="1">
+      <a:defRPr sz="1200" kern="1200">
+        <a:solidFill>
+          <a:schemeClr val="tx1"/>
+        </a:solidFill>
+        <a:latin typeface="+mn-lt"/>
+        <a:ea typeface="+mn-ea"/>
+        <a:cs typeface="+mn-cs"/>
+      </a:defRPr>
+    </a:lvl3pPr>
+    <a:lvl4pPr marL="1371600" algn="l" defTabSz="914400" rtl="0" eaLnBrk="1" latinLnBrk="0" hangingPunct="1">
+      <a:defRPr sz="1200" kern="1200">
+        <a:solidFill>
+          <a:schemeClr val="tx1"/>
+        </a:solidFill>
+        <a:latin typeface="+mn-lt"/>
+        <a:ea typeface="+mn-ea"/>
+        <a:cs typeface="+mn-cs"/>
+      </a:defRPr>
+    </a:lvl4pPr>
+    <a:lvl5pPr marL="1828800" algn="l" defTabSz="914400" rtl="0" eaLnBrk="1" latinLnBrk="0" hangingPunct="1">
+      <a:defRPr sz="1200" kern="1200">
+        <a:solidFill>
+          <a:schemeClr val="tx1"/>
+        </a:solidFill>
+        <a:latin typeface="+mn-lt"/>
+        <a:ea typeface="+mn-ea"/>
+        <a:cs typeface="+mn-cs"/>
+      </a:defRPr>
+    </a:lvl5pPr>
+    <a:lvl6pPr marL="2286000" algn="l" defTabSz="914400" rtl="0" eaLnBrk="1" latinLnBrk="0" hangingPunct="1">
+      <a:defRPr sz="1200" kern="1200">
+        <a:solidFill>
+          <a:schemeClr val="tx1"/>
+        </a:solidFill>
+        <a:latin typeface="+mn-lt"/>
+        <a:ea typeface="+mn-ea"/>
+        <a:cs typeface="+mn-cs"/>
+      </a:defRPr>
+    </a:lvl6pPr>
+    <a:lvl7pPr marL="2743200" algn="l" defTabSz="914400" rtl="0" eaLnBrk="1" latinLnBrk="0" hangingPunct="1">
+      <a:defRPr sz="1200" kern="1200">
+        <a:solidFill>
+          <a:schemeClr val="tx1"/>
+        </a:solidFill>
+        <a:latin typeface="+mn-lt"/>
+        <a:ea typeface="+mn-ea"/>
+        <a:cs typeface="+mn-cs"/>
+      </a:defRPr>
+    </a:lvl7pPr>
+    <a:lvl8pPr marL="3200400" algn="l" defTabSz="914400" rtl="0" eaLnBrk="1" latinLnBrk="0" hangingPunct="1">
+      <a:defRPr sz="1200" kern="1200">
+        <a:solidFill>
+          <a:schemeClr val="tx1"/>
+        </a:solidFill>
+        <a:latin typeface="+mn-lt"/>
+        <a:ea typeface="+mn-ea"/>
+        <a:cs typeface="+mn-cs"/>
+      </a:defRPr>
+    </a:lvl8pPr>
+    <a:lvl9pPr marL="3657600" algn="l" defTabSz="914400" rtl="0" eaLnBrk="1" latinLnBrk="0" hangingPunct="1">
+      <a:defRPr sz="1200" kern="1200">
+        <a:solidFill>
+          <a:schemeClr val="tx1"/>
+        </a:solidFill>
+        <a:latin typeface="+mn-lt"/>
+        <a:ea typeface="+mn-ea"/>
+        <a:cs typeface="+mn-cs"/>
+      </a:defRPr>
+    </a:lvl9pPr>
+  </p:notesStyle>
+</p:notesMaster>
+</file>
+
+<file path=ppt/notesSlides/notesSlide1.xml><?xml version="1.0" encoding="utf-8"?>
+<p:notes xmlns:a="http://schemas.openxmlformats.org/drawingml/2006/main" xmlns:r="http://schemas.openxmlformats.org/officeDocument/2006/relationships" xmlns:p="http://schemas.openxmlformats.org/presentationml/2006/main">
+  <p:cSld>
+    <p:spTree>
+      <p:nvGrpSpPr>
+        <p:cNvPr id="1" name=""/>
+        <p:cNvGrpSpPr/>
+        <p:nvPr/>
+      </p:nvGrpSpPr>
+      <p:grpSpPr>
+        <a:xfrm>
+          <a:off x="0" y="0"/>
+          <a:ext cx="0" cy="0"/>
+          <a:chOff x="0" y="0"/>
+          <a:chExt cx="0" cy="0"/>
+        </a:xfrm>
+      </p:grpSpPr>
+      <p:sp>
+        <p:nvSpPr>
+          <p:cNvPr id="2" name="Slide Image Placeholder 1"/>
+          <p:cNvSpPr>
+            <a:spLocks noGrp="1" noRot="1" noChangeAspect="1"/>
+          </p:cNvSpPr>
+          <p:nvPr>
+            <p:ph type="sldImg"/>
+          </p:nvPr>
+        </p:nvSpPr>
+        <p:spPr/>
+      </p:sp>
+      <p:sp>
+        <p:nvSpPr>
+          <p:cNvPr id="3" name="Notes Placeholder 2"/>
+          <p:cNvSpPr>
+            <a:spLocks noGrp="1"/>
+          </p:cNvSpPr>
+          <p:nvPr>
+            <p:ph type="body" idx="1"/>
+          </p:nvPr>
+        </p:nvSpPr>
+        <p:spPr/>
+        <p:txBody>
+          <a:bodyPr/>
+          <a:lstStyle/>
+          <a:p>
+            <a:pPr marL="228600" indent="-228600">
+              <a:buAutoNum type="arabicPeriod"/>
+            </a:pPr>
+            <a:r>
+              <a:rPr lang="en-US" sz="1200" b="0" i="0" u="none" strike="noStrike" kern="1200" dirty="0" err="1">
+                <a:solidFill>
+                  <a:schemeClr val="tx1"/>
+                </a:solidFill>
+                <a:effectLst/>
+                <a:latin typeface="+mn-lt"/>
+                <a:ea typeface="+mn-ea"/>
+                <a:cs typeface="+mn-cs"/>
+              </a:rPr>
+              <a:t>Tavakol</a:t>
+            </a:r>
+            <a:r>
+              <a:rPr lang="en-US" sz="1200" b="0" i="0" u="none" strike="noStrike" kern="1200" dirty="0">
+                <a:solidFill>
+                  <a:schemeClr val="tx1"/>
+                </a:solidFill>
+                <a:effectLst/>
+                <a:latin typeface="+mn-lt"/>
+                <a:ea typeface="+mn-ea"/>
+                <a:cs typeface="+mn-cs"/>
+              </a:rPr>
+              <a:t>, M., &amp; O'Brien, D. (2023). The importance of crafting a good introduction to scholarly research: strategies for creating an effective and impactful opening statement. </a:t>
+            </a:r>
+            <a:r>
+              <a:rPr lang="en-US" sz="1200" b="0" i="1" u="none" strike="noStrike" kern="1200" dirty="0">
+                <a:solidFill>
+                  <a:schemeClr val="tx1"/>
+                </a:solidFill>
+                <a:effectLst/>
+                <a:latin typeface="+mn-lt"/>
+                <a:ea typeface="+mn-ea"/>
+                <a:cs typeface="+mn-cs"/>
+              </a:rPr>
+              <a:t>International journal of medical education</a:t>
+            </a:r>
+            <a:r>
+              <a:rPr lang="en-US" sz="1200" b="0" i="0" u="none" strike="noStrike" kern="1200" dirty="0">
+                <a:solidFill>
+                  <a:schemeClr val="tx1"/>
+                </a:solidFill>
+                <a:effectLst/>
+                <a:latin typeface="+mn-lt"/>
+                <a:ea typeface="+mn-ea"/>
+                <a:cs typeface="+mn-cs"/>
+              </a:rPr>
+              <a:t>, </a:t>
+            </a:r>
+            <a:r>
+              <a:rPr lang="en-US" sz="1200" b="0" i="1" u="none" strike="noStrike" kern="1200" dirty="0">
+                <a:solidFill>
+                  <a:schemeClr val="tx1"/>
+                </a:solidFill>
+                <a:effectLst/>
+                <a:latin typeface="+mn-lt"/>
+                <a:ea typeface="+mn-ea"/>
+                <a:cs typeface="+mn-cs"/>
+              </a:rPr>
+              <a:t>14</a:t>
+            </a:r>
+            <a:r>
+              <a:rPr lang="en-US" sz="1200" b="0" i="0" u="none" strike="noStrike" kern="1200" dirty="0">
+                <a:solidFill>
+                  <a:schemeClr val="tx1"/>
+                </a:solidFill>
+                <a:effectLst/>
+                <a:latin typeface="+mn-lt"/>
+                <a:ea typeface="+mn-ea"/>
+                <a:cs typeface="+mn-cs"/>
+              </a:rPr>
+              <a:t>, 84–87. https://</a:t>
+            </a:r>
+            <a:r>
+              <a:rPr lang="en-US" sz="1200" b="0" i="0" u="none" strike="noStrike" kern="1200" dirty="0" err="1">
+                <a:solidFill>
+                  <a:schemeClr val="tx1"/>
+                </a:solidFill>
+                <a:effectLst/>
+                <a:latin typeface="+mn-lt"/>
+                <a:ea typeface="+mn-ea"/>
+                <a:cs typeface="+mn-cs"/>
+              </a:rPr>
+              <a:t>doi.org</a:t>
+            </a:r>
+            <a:r>
+              <a:rPr lang="en-US" sz="1200" b="0" i="0" u="none" strike="noStrike" kern="1200" dirty="0">
+                <a:solidFill>
+                  <a:schemeClr val="tx1"/>
+                </a:solidFill>
+                <a:effectLst/>
+                <a:latin typeface="+mn-lt"/>
+                <a:ea typeface="+mn-ea"/>
+                <a:cs typeface="+mn-cs"/>
+              </a:rPr>
+              <a:t>/10.5116/ijme.6499.82af</a:t>
+            </a:r>
+          </a:p>
+          <a:p>
+            <a:pPr marL="228600" indent="-228600">
+              <a:buAutoNum type="arabicPeriod"/>
+            </a:pPr>
+            <a:r>
+              <a:rPr lang="en-US" sz="1200" b="0" i="0" u="none" strike="noStrike" kern="1200" dirty="0">
+                <a:solidFill>
+                  <a:schemeClr val="tx1"/>
+                </a:solidFill>
+                <a:effectLst/>
+                <a:latin typeface="+mn-lt"/>
+                <a:ea typeface="+mn-ea"/>
+                <a:cs typeface="+mn-cs"/>
+              </a:rPr>
+              <a:t>https://</a:t>
+            </a:r>
+            <a:r>
+              <a:rPr lang="en-US" sz="1200" b="0" i="0" u="none" strike="noStrike" kern="1200" dirty="0" err="1">
+                <a:solidFill>
+                  <a:schemeClr val="tx1"/>
+                </a:solidFill>
+                <a:effectLst/>
+                <a:latin typeface="+mn-lt"/>
+                <a:ea typeface="+mn-ea"/>
+                <a:cs typeface="+mn-cs"/>
+              </a:rPr>
+              <a:t>www.sjsu.edu</a:t>
+            </a:r>
+            <a:r>
+              <a:rPr lang="en-US" sz="1200" b="0" i="0" u="none" strike="noStrike" kern="1200" dirty="0">
+                <a:solidFill>
+                  <a:schemeClr val="tx1"/>
+                </a:solidFill>
+                <a:effectLst/>
+                <a:latin typeface="+mn-lt"/>
+                <a:ea typeface="+mn-ea"/>
+                <a:cs typeface="+mn-cs"/>
+              </a:rPr>
+              <a:t>/</a:t>
+            </a:r>
+            <a:r>
+              <a:rPr lang="en-US" sz="1200" b="0" i="0" u="none" strike="noStrike" kern="1200" dirty="0" err="1">
+                <a:solidFill>
+                  <a:schemeClr val="tx1"/>
+                </a:solidFill>
+                <a:effectLst/>
+                <a:latin typeface="+mn-lt"/>
+                <a:ea typeface="+mn-ea"/>
+                <a:cs typeface="+mn-cs"/>
+              </a:rPr>
+              <a:t>writingcenter</a:t>
+            </a:r>
+            <a:r>
+              <a:rPr lang="en-US" sz="1200" b="0" i="0" u="none" strike="noStrike" kern="1200" dirty="0">
+                <a:solidFill>
+                  <a:schemeClr val="tx1"/>
+                </a:solidFill>
+                <a:effectLst/>
+                <a:latin typeface="+mn-lt"/>
+                <a:ea typeface="+mn-ea"/>
+                <a:cs typeface="+mn-cs"/>
+              </a:rPr>
+              <a:t>/docs/handouts/Introduction%20of%20Research%20Papers.pdf</a:t>
+            </a:r>
+          </a:p>
+          <a:p>
+            <a:pPr marL="228600" indent="-228600">
+              <a:buAutoNum type="arabicPeriod"/>
+            </a:pPr>
+            <a:endParaRPr lang="en-US" dirty="0"/>
+          </a:p>
+        </p:txBody>
+      </p:sp>
+      <p:sp>
+        <p:nvSpPr>
+          <p:cNvPr id="4" name="Slide Number Placeholder 3"/>
+          <p:cNvSpPr>
+            <a:spLocks noGrp="1"/>
+          </p:cNvSpPr>
+          <p:nvPr>
+            <p:ph type="sldNum" sz="quarter" idx="5"/>
+          </p:nvPr>
+        </p:nvSpPr>
+        <p:spPr/>
+        <p:txBody>
+          <a:bodyPr/>
+          <a:lstStyle/>
+          <a:p>
+            <a:fld id="{67214DAA-C5EC-DA41-9E6B-E06EDAF0EB4F}" type="slidenum">
+              <a:rPr lang="en-US" smtClean="0"/>
+              <a:t>2</a:t>
+            </a:fld>
+            <a:endParaRPr lang="en-US"/>
+          </a:p>
+        </p:txBody>
+      </p:sp>
+    </p:spTree>
+    <p:extLst>
+      <p:ext uri="{BB962C8B-B14F-4D97-AF65-F5344CB8AC3E}">
+        <p14:creationId xmlns:p14="http://schemas.microsoft.com/office/powerpoint/2010/main" val="806669173"/>
+      </p:ext>
+    </p:extLst>
+  </p:cSld>
+  <p:clrMapOvr>
+    <a:masterClrMapping/>
+  </p:clrMapOvr>
+</p:notes>
+</file>
+
 <file path=ppt/slideLayouts/slideLayout1.xml><?xml version="1.0" encoding="utf-8"?>
 <p:sldLayout xmlns:a="http://schemas.openxmlformats.org/drawingml/2006/main" xmlns:r="http://schemas.openxmlformats.org/officeDocument/2006/relationships" xmlns:p="http://schemas.openxmlformats.org/presentationml/2006/main" type="title" preserve="1">
   <p:cSld name="Title Slide">
@@ -288,7 +891,7 @@
           <a:p>
             <a:fld id="{1160EA64-D806-43AC-9DF2-F8C432F32B4C}" type="datetimeFigureOut">
               <a:rPr lang="en-US" dirty="0"/>
-              <a:t>12/19/25</a:t>
+              <a:t>1/16/26</a:t>
             </a:fld>
             <a:endParaRPr lang="en-US" dirty="0"/>
           </a:p>
@@ -454,7 +1057,7 @@
           <a:p>
             <a:fld id="{E9F9C37B-1D36-470B-8223-D6C91242EC14}" type="datetimeFigureOut">
               <a:rPr lang="en-US" dirty="0"/>
-              <a:t>12/19/25</a:t>
+              <a:t>1/16/26</a:t>
             </a:fld>
             <a:endParaRPr lang="en-US" dirty="0"/>
           </a:p>
@@ -629,7 +1232,7 @@
           <a:p>
             <a:fld id="{67C6F52A-A82B-47A2-A83A-8C4C91F2D59F}" type="datetimeFigureOut">
               <a:rPr lang="en-US" dirty="0"/>
-              <a:t>12/19/25</a:t>
+              <a:t>1/16/26</a:t>
             </a:fld>
             <a:endParaRPr lang="en-US" dirty="0"/>
           </a:p>
@@ -794,7 +1397,7 @@
           <a:p>
             <a:fld id="{F070A7B3-6521-4DCA-87E5-044747A908C1}" type="datetimeFigureOut">
               <a:rPr lang="en-US" dirty="0"/>
-              <a:t>12/19/25</a:t>
+              <a:t>1/16/26</a:t>
             </a:fld>
             <a:endParaRPr lang="en-US" dirty="0"/>
           </a:p>
@@ -1058,7 +1661,7 @@
           <a:p>
             <a:fld id="{1160EA64-D806-43AC-9DF2-F8C432F32B4C}" type="datetimeFigureOut">
               <a:rPr lang="en-US" dirty="0"/>
-              <a:t>12/19/25</a:t>
+              <a:t>1/16/26</a:t>
             </a:fld>
             <a:endParaRPr lang="en-US" dirty="0"/>
           </a:p>
@@ -1286,7 +1889,7 @@
           <a:p>
             <a:fld id="{AB134690-1557-4C89-A502-4959FE7FAD70}" type="datetimeFigureOut">
               <a:rPr lang="en-US" dirty="0"/>
-              <a:t>12/19/25</a:t>
+              <a:t>1/16/26</a:t>
             </a:fld>
             <a:endParaRPr lang="en-US" dirty="0"/>
           </a:p>
@@ -1640,7 +2243,7 @@
           <a:p>
             <a:fld id="{4F7D4976-E339-4826-83B7-FBD03F55ECF8}" type="datetimeFigureOut">
               <a:rPr lang="en-US" dirty="0"/>
-              <a:t>12/19/25</a:t>
+              <a:t>1/16/26</a:t>
             </a:fld>
             <a:endParaRPr lang="en-US" dirty="0"/>
           </a:p>
@@ -1776,7 +2379,7 @@
           <a:p>
             <a:fld id="{E1037C31-9E7A-4F99-8774-A0E530DE1A42}" type="datetimeFigureOut">
               <a:rPr lang="en-US" dirty="0"/>
-              <a:t>12/19/25</a:t>
+              <a:t>1/16/26</a:t>
             </a:fld>
             <a:endParaRPr lang="en-US" dirty="0"/>
           </a:p>
@@ -1866,7 +2469,7 @@
           <a:p>
             <a:fld id="{C278504F-A551-4DE0-9316-4DCD1D8CC752}" type="datetimeFigureOut">
               <a:rPr lang="en-US" dirty="0"/>
-              <a:t>12/19/25</a:t>
+              <a:t>1/16/26</a:t>
             </a:fld>
             <a:endParaRPr lang="en-US" dirty="0"/>
           </a:p>
@@ -2218,7 +2821,7 @@
           <a:p>
             <a:fld id="{D1BE4249-C0D0-4B06-8692-E8BB871AF643}" type="datetimeFigureOut">
               <a:rPr lang="en-US" dirty="0"/>
-              <a:t>12/19/25</a:t>
+              <a:t>1/16/26</a:t>
             </a:fld>
             <a:endParaRPr lang="en-US" dirty="0"/>
           </a:p>
@@ -2570,7 +3173,7 @@
           <a:p>
             <a:fld id="{042B0DB6-F5C7-45FB-8CF3-31B45F9C2DAC}" type="datetimeFigureOut">
               <a:rPr lang="en-US" dirty="0"/>
-              <a:t>12/19/25</a:t>
+              <a:t>1/16/26</a:t>
             </a:fld>
             <a:endParaRPr lang="en-US" dirty="0"/>
           </a:p>
@@ -2807,7 +3410,7 @@
           <a:p>
             <a:fld id="{1160EA64-D806-43AC-9DF2-F8C432F32B4C}" type="datetimeFigureOut">
               <a:rPr lang="en-US" dirty="0"/>
-              <a:t>12/19/25</a:t>
+              <a:t>1/16/26</a:t>
             </a:fld>
             <a:endParaRPr lang="en-US" dirty="0"/>
           </a:p>
@@ -3279,7 +3882,7 @@
           <a:p>
             <a:r>
               <a:rPr lang="en-US" dirty="0"/>
-              <a:t>Results</a:t>
+              <a:t>Introduction </a:t>
             </a:r>
           </a:p>
         </p:txBody>
@@ -3305,7 +3908,7 @@
           <a:bodyPr/>
           <a:lstStyle/>
           <a:p>
-            <a:endParaRPr lang="en-US"/>
+            <a:endParaRPr lang="en-US" dirty="0"/>
           </a:p>
         </p:txBody>
       </p:sp>
@@ -3330,7 +3933,7 @@
         <p:cNvPr id="1" name="">
           <a:extLst>
             <a:ext uri="{FF2B5EF4-FFF2-40B4-BE49-F238E27FC236}">
-              <a16:creationId xmlns:a16="http://schemas.microsoft.com/office/drawing/2014/main" id="{368FA8D4-372E-CBC7-4E34-471A9EF49744}"/>
+              <a16:creationId xmlns:a16="http://schemas.microsoft.com/office/drawing/2014/main" id="{E79EA582-9EF7-7CEC-A979-96AC9C259400}"/>
             </a:ext>
           </a:extLst>
         </p:cNvPr>
@@ -3350,7 +3953,7 @@
           <p:cNvPr id="2" name="Title 1">
             <a:extLst>
               <a:ext uri="{FF2B5EF4-FFF2-40B4-BE49-F238E27FC236}">
-                <a16:creationId xmlns:a16="http://schemas.microsoft.com/office/drawing/2014/main" id="{B14C2042-6BA0-292A-2BD8-5D83F557AC62}"/>
+                <a16:creationId xmlns:a16="http://schemas.microsoft.com/office/drawing/2014/main" id="{B2AAC6E0-9113-BF83-9470-63151CBD65F0}"/>
               </a:ext>
             </a:extLst>
           </p:cNvPr>
@@ -3368,7 +3971,7 @@
           <a:p>
             <a:r>
               <a:rPr lang="en-US" dirty="0"/>
-              <a:t>Effect Measure Modification </a:t>
+              <a:t>Introduce Research Scope</a:t>
             </a:r>
           </a:p>
         </p:txBody>
@@ -3378,7 +3981,7 @@
           <p:cNvPr id="3" name="Content Placeholder 2">
             <a:extLst>
               <a:ext uri="{FF2B5EF4-FFF2-40B4-BE49-F238E27FC236}">
-                <a16:creationId xmlns:a16="http://schemas.microsoft.com/office/drawing/2014/main" id="{EF9B642D-957F-AD50-3CF5-59788903DF36}"/>
+                <a16:creationId xmlns:a16="http://schemas.microsoft.com/office/drawing/2014/main" id="{7E12F308-0DDB-FFEE-0547-28DE20B007E8}"/>
               </a:ext>
             </a:extLst>
           </p:cNvPr>
@@ -3396,66 +3999,55 @@
           </a:bodyPr>
           <a:lstStyle/>
           <a:p>
-            <a:pPr lvl="1"/>
-            <a:r>
-              <a:rPr lang="en-US" dirty="0"/>
-              <a:t>When we are dealing with effect measure modification we want to look at the marginal association (that which we estimate in the </a:t>
-            </a:r>
-            <a:r>
-              <a:rPr lang="en-US" b="1" dirty="0"/>
-              <a:t>entire population</a:t>
-            </a:r>
-            <a:r>
-              <a:rPr lang="en-US" dirty="0"/>
-              <a:t>) within subgroups of a variable we believe that association may be stronger or weaker </a:t>
-            </a:r>
-          </a:p>
-          <a:p>
-            <a:pPr lvl="1"/>
-            <a:r>
-              <a:rPr lang="en-US" dirty="0"/>
-              <a:t>We refer to this as an effect modifier. </a:t>
-            </a:r>
-          </a:p>
-          <a:p>
-            <a:pPr lvl="2"/>
-            <a:r>
-              <a:rPr lang="en-US" dirty="0"/>
-              <a:t>That is that the effect of an exposure,  A on the outcome,  Y, is modified by X (effect measure modifier) </a:t>
-            </a:r>
-          </a:p>
-          <a:p>
-            <a:pPr lvl="2"/>
-            <a:r>
-              <a:rPr lang="en-US" dirty="0"/>
-              <a:t>In the presence of effect measure modification (EMM) the </a:t>
-            </a:r>
-            <a:r>
-              <a:rPr lang="en-US" b="1" dirty="0"/>
-              <a:t>magnitude</a:t>
-            </a:r>
-            <a:r>
-              <a:rPr lang="en-US" dirty="0"/>
-              <a:t> of the association can vary across levels of that variable</a:t>
-            </a:r>
-          </a:p>
-          <a:p>
-            <a:pPr lvl="3"/>
-            <a:r>
-              <a:rPr lang="en-US" dirty="0"/>
-              <a:t>Ex: Sex (female, male) </a:t>
-            </a:r>
-          </a:p>
-          <a:p>
-            <a:pPr lvl="1"/>
-            <a:endParaRPr lang="en-US" dirty="0"/>
+            <a:r>
+              <a:rPr lang="en-US" b="1" dirty="0">
+                <a:solidFill>
+                  <a:srgbClr val="002060"/>
+                </a:solidFill>
+              </a:rPr>
+              <a:t>Start with: </a:t>
+            </a:r>
+            <a:r>
+              <a:rPr lang="en-US" dirty="0"/>
+              <a:t>outlining steps taken to respond to identified knowledge gap previously identified. </a:t>
+            </a:r>
+            <a:r>
+              <a:rPr lang="en-US" baseline="30000" dirty="0"/>
+              <a:t>2</a:t>
+            </a:r>
+          </a:p>
+          <a:p>
+            <a:r>
+              <a:rPr lang="en-US" dirty="0"/>
+              <a:t>Conceptualized as the response and/or promised solution</a:t>
+            </a:r>
+            <a:r>
+              <a:rPr lang="en-US" baseline="30000" dirty="0"/>
+              <a:t>3</a:t>
+            </a:r>
+            <a:r>
+              <a:rPr lang="en-US" dirty="0"/>
+              <a:t> to issues raised via research study and new knowledge. </a:t>
+            </a:r>
+          </a:p>
+          <a:p>
+            <a:r>
+              <a:rPr lang="en-US" dirty="0"/>
+              <a:t>May be helpful to introduce innovation. of research idea or continuation of established work from research team. </a:t>
+            </a:r>
+          </a:p>
+          <a:p>
+            <a:pPr marL="0" indent="0">
+              <a:buNone/>
+            </a:pPr>
+            <a:endParaRPr lang="en-US" sz="2000" b="1" dirty="0"/>
           </a:p>
         </p:txBody>
       </p:sp>
     </p:spTree>
     <p:extLst>
       <p:ext uri="{BB962C8B-B14F-4D97-AF65-F5344CB8AC3E}">
-        <p14:creationId xmlns:p14="http://schemas.microsoft.com/office/powerpoint/2010/main" val="1219570187"/>
+        <p14:creationId xmlns:p14="http://schemas.microsoft.com/office/powerpoint/2010/main" val="626922969"/>
       </p:ext>
     </p:extLst>
   </p:cSld>
@@ -3473,7 +4065,7 @@
         <p:cNvPr id="1" name="">
           <a:extLst>
             <a:ext uri="{FF2B5EF4-FFF2-40B4-BE49-F238E27FC236}">
-              <a16:creationId xmlns:a16="http://schemas.microsoft.com/office/drawing/2014/main" id="{F9CD9C4C-8ECC-038E-7525-F3CE1A7BF656}"/>
+              <a16:creationId xmlns:a16="http://schemas.microsoft.com/office/drawing/2014/main" id="{45AB9C5E-588D-EBC6-AAC9-E3F577227CEE}"/>
             </a:ext>
           </a:extLst>
         </p:cNvPr>
@@ -3493,7 +4085,7 @@
           <p:cNvPr id="2" name="Title 1">
             <a:extLst>
               <a:ext uri="{FF2B5EF4-FFF2-40B4-BE49-F238E27FC236}">
-                <a16:creationId xmlns:a16="http://schemas.microsoft.com/office/drawing/2014/main" id="{19A899D8-13EB-E054-66E5-F5E757A5089F}"/>
+                <a16:creationId xmlns:a16="http://schemas.microsoft.com/office/drawing/2014/main" id="{D6E8B9DC-2074-D61A-1A84-D33DB54DC02E}"/>
               </a:ext>
             </a:extLst>
           </p:cNvPr>
@@ -3511,7 +4103,7 @@
           <a:p>
             <a:r>
               <a:rPr lang="en-US" dirty="0"/>
-              <a:t>Effect Measure Modification </a:t>
+              <a:t>Introduce Research Scope</a:t>
             </a:r>
           </a:p>
         </p:txBody>
@@ -3521,7 +4113,7 @@
           <p:cNvPr id="3" name="Content Placeholder 2">
             <a:extLst>
               <a:ext uri="{FF2B5EF4-FFF2-40B4-BE49-F238E27FC236}">
-                <a16:creationId xmlns:a16="http://schemas.microsoft.com/office/drawing/2014/main" id="{9D76006D-3FAB-7310-1FC7-F3CBEB6467F1}"/>
+                <a16:creationId xmlns:a16="http://schemas.microsoft.com/office/drawing/2014/main" id="{5B3E454E-18A2-6052-0ABF-A99A5C1615EB}"/>
               </a:ext>
             </a:extLst>
           </p:cNvPr>
@@ -3539,55 +4131,102 @@
           </a:bodyPr>
           <a:lstStyle/>
           <a:p>
+            <a:r>
+              <a:rPr lang="en-US" b="1" dirty="0">
+                <a:solidFill>
+                  <a:srgbClr val="002060"/>
+                </a:solidFill>
+              </a:rPr>
+              <a:t>Transition into: </a:t>
+            </a:r>
+            <a:r>
+              <a:rPr lang="en-US" dirty="0">
+                <a:solidFill>
+                  <a:schemeClr val="tx1"/>
+                </a:solidFill>
+              </a:rPr>
+              <a:t>providing</a:t>
+            </a:r>
+            <a:r>
+              <a:rPr lang="en-US" b="1" dirty="0">
+                <a:solidFill>
+                  <a:schemeClr val="tx1"/>
+                </a:solidFill>
+              </a:rPr>
+              <a:t> </a:t>
+            </a:r>
+            <a:r>
+              <a:rPr lang="en-US" dirty="0">
+                <a:solidFill>
+                  <a:schemeClr val="tx1"/>
+                </a:solidFill>
+              </a:rPr>
+              <a:t>details to support methods and results section </a:t>
+            </a:r>
+            <a:endParaRPr lang="en-US" baseline="30000" dirty="0">
+              <a:solidFill>
+                <a:schemeClr val="tx1"/>
+              </a:solidFill>
+            </a:endParaRPr>
+          </a:p>
+          <a:p>
+            <a:r>
+              <a:rPr lang="en-US" dirty="0"/>
+              <a:t>Explicitly state research question, aims, hypothesis and other relevant areas of research scope (</a:t>
+            </a:r>
+            <a:r>
+              <a:rPr lang="en-US" dirty="0" err="1"/>
+              <a:t>e.g</a:t>
+            </a:r>
+            <a:r>
+              <a:rPr lang="en-US" dirty="0"/>
+              <a:t> study population</a:t>
+            </a:r>
+            <a:r>
+              <a:rPr lang="en-US" baseline="30000" dirty="0"/>
+              <a:t>)1.</a:t>
+            </a:r>
+            <a:r>
+              <a:rPr lang="en-US" dirty="0"/>
+              <a:t> </a:t>
+            </a:r>
+          </a:p>
+          <a:p>
+            <a:r>
+              <a:rPr lang="en-US" dirty="0"/>
+              <a:t>Keep language consistent with elements of research study design and overall objective. </a:t>
+            </a:r>
+          </a:p>
+          <a:p>
             <a:pPr lvl="1"/>
             <a:r>
               <a:rPr lang="en-US" dirty="0"/>
-              <a:t>EMM is an intrinsic phenomenon we cannot and do not seek to eliminate </a:t>
+              <a:t>E.g. study population, exposure classification and definition, description of outcome</a:t>
             </a:r>
           </a:p>
           <a:p>
             <a:pPr lvl="1"/>
             <a:r>
               <a:rPr lang="en-US" dirty="0"/>
-              <a:t>In other words EMM is not an internal validity issue (</a:t>
-            </a:r>
-            <a:r>
-              <a:rPr lang="en-US" dirty="0" err="1"/>
-              <a:t>i.e</a:t>
-            </a:r>
-            <a:r>
-              <a:rPr lang="en-US" dirty="0"/>
-              <a:t> bias such as confounding or selection bias) </a:t>
-            </a:r>
-          </a:p>
-          <a:p>
-            <a:pPr lvl="2"/>
-            <a:r>
-              <a:rPr lang="en-US" dirty="0"/>
-              <a:t>It is an external validity factor (</a:t>
-            </a:r>
-            <a:r>
-              <a:rPr lang="en-US" dirty="0" err="1"/>
-              <a:t>i.e</a:t>
-            </a:r>
-            <a:r>
-              <a:rPr lang="en-US" dirty="0"/>
-              <a:t> generalizability) </a:t>
-            </a:r>
-          </a:p>
-          <a:p>
-            <a:pPr lvl="2"/>
-            <a:r>
-              <a:rPr lang="en-US" dirty="0"/>
-              <a:t>Again it is distinct from confounding,  although both ultimately become variables we adjust for but for different reasons</a:t>
-            </a:r>
+              <a:t>Do not overstate goals of study that are not consistent with study design. </a:t>
+            </a:r>
+          </a:p>
+          <a:p>
+            <a:pPr lvl="1"/>
+            <a:endParaRPr lang="en-US" dirty="0"/>
+          </a:p>
+          <a:p>
+            <a:pPr marL="0" indent="0">
+              <a:buNone/>
+            </a:pPr>
+            <a:endParaRPr lang="en-US" sz="2000" b="1" dirty="0"/>
           </a:p>
         </p:txBody>
       </p:sp>
     </p:spTree>
     <p:extLst>
       <p:ext uri="{BB962C8B-B14F-4D97-AF65-F5344CB8AC3E}">
-        <p14:creationId xmlns:p14="http://schemas.microsoft.com/office/powerpoint/2010/main" val="3018051427"/>
+        <p14:creationId xmlns:p14="http://schemas.microsoft.com/office/powerpoint/2010/main" val="1012766784"/>
       </p:ext>
     </p:extLst>
   </p:cSld>
@@ -3602,13 +4241,7 @@
   <p:cSld>
     <p:spTree>
       <p:nvGrpSpPr>
-        <p:cNvPr id="1" name="">
-          <a:extLst>
-            <a:ext uri="{FF2B5EF4-FFF2-40B4-BE49-F238E27FC236}">
-              <a16:creationId xmlns:a16="http://schemas.microsoft.com/office/drawing/2014/main" id="{06F70894-8311-0D20-E7CA-799680A05226}"/>
-            </a:ext>
-          </a:extLst>
-        </p:cNvPr>
+        <p:cNvPr id="1" name=""/>
         <p:cNvGrpSpPr/>
         <p:nvPr/>
       </p:nvGrpSpPr>
@@ -3625,7 +4258,7 @@
           <p:cNvPr id="2" name="Title 1">
             <a:extLst>
               <a:ext uri="{FF2B5EF4-FFF2-40B4-BE49-F238E27FC236}">
-                <a16:creationId xmlns:a16="http://schemas.microsoft.com/office/drawing/2014/main" id="{5DFE10CA-8E38-41E7-E20F-BE0CE19B061B}"/>
+                <a16:creationId xmlns:a16="http://schemas.microsoft.com/office/drawing/2014/main" id="{E20AB49C-212B-7D8D-BAB7-1CE9939888B5}"/>
               </a:ext>
             </a:extLst>
           </p:cNvPr>
@@ -3643,7 +4276,7 @@
           <a:p>
             <a:r>
               <a:rPr lang="en-US" dirty="0"/>
-              <a:t>Effect Measure Modification </a:t>
+              <a:t>General Tips</a:t>
             </a:r>
           </a:p>
         </p:txBody>
@@ -3653,7 +4286,7 @@
           <p:cNvPr id="3" name="Content Placeholder 2">
             <a:extLst>
               <a:ext uri="{FF2B5EF4-FFF2-40B4-BE49-F238E27FC236}">
-                <a16:creationId xmlns:a16="http://schemas.microsoft.com/office/drawing/2014/main" id="{CE156A72-58E9-0808-9DF5-36AFA83409C8}"/>
+                <a16:creationId xmlns:a16="http://schemas.microsoft.com/office/drawing/2014/main" id="{1048FC8B-7E94-F02A-0A7F-A117C553362A}"/>
               </a:ext>
             </a:extLst>
           </p:cNvPr>
@@ -3666,608 +4299,71 @@
         </p:nvSpPr>
         <p:spPr/>
         <p:txBody>
-          <a:bodyPr>
-            <a:normAutofit/>
-          </a:bodyPr>
-          <a:lstStyle/>
+          <a:bodyPr/>
+          <a:lstStyle/>
+          <a:p>
+            <a:r>
+              <a:rPr lang="en-US" dirty="0"/>
+              <a:t>Utilize existing literature from peer reviewed sources as supporting details needed for all components</a:t>
+            </a:r>
+            <a:r>
+              <a:rPr lang="en-US" baseline="30000" dirty="0"/>
+              <a:t>1</a:t>
+            </a:r>
+            <a:r>
+              <a:rPr lang="en-US" dirty="0"/>
+              <a:t> </a:t>
+            </a:r>
+          </a:p>
+          <a:p>
+            <a:r>
+              <a:rPr lang="en-US" dirty="0"/>
+              <a:t>Try to keep definition of key variables consistent with conceptual and theoretical application in research study</a:t>
+            </a:r>
+            <a:r>
+              <a:rPr lang="en-US" baseline="30000" dirty="0"/>
+              <a:t>1</a:t>
+            </a:r>
+            <a:r>
+              <a:rPr lang="en-US" dirty="0"/>
+              <a:t> </a:t>
+            </a:r>
+          </a:p>
+          <a:p>
+            <a:r>
+              <a:rPr lang="en-US" dirty="0"/>
+              <a:t>Investigate introductions in discipline to see how they are organized, similarities and differences across approaches</a:t>
+            </a:r>
+            <a:r>
+              <a:rPr lang="en-US" baseline="30000" dirty="0"/>
+              <a:t>2</a:t>
+            </a:r>
+            <a:r>
+              <a:rPr lang="en-US" dirty="0"/>
+              <a:t> </a:t>
+            </a:r>
+          </a:p>
           <a:p>
             <a:pPr lvl="1"/>
             <a:r>
-              <a:rPr lang="en-US"/>
-              <a:t>EMM is an intrinsic phenomenon we cannot and do not seek to eliminate </a:t>
-            </a:r>
-          </a:p>
-          <a:p>
-            <a:pPr lvl="1"/>
-            <a:r>
-              <a:rPr lang="en-US"/>
-              <a:t>In other words EMM is not an internal validity issue (i.e bias such as confounding or selection bias) </a:t>
-            </a:r>
-          </a:p>
-          <a:p>
-            <a:pPr lvl="2"/>
-            <a:r>
-              <a:rPr lang="en-US"/>
-              <a:t>It is an external validity factor (i.e generalizability) </a:t>
-            </a:r>
-          </a:p>
-          <a:p>
-            <a:pPr lvl="2"/>
-            <a:r>
-              <a:rPr lang="en-US"/>
-              <a:t>Again it is distinct from confounding,  although both ultimately become variables we adjust for but for different reasons</a:t>
-            </a:r>
-          </a:p>
-          <a:p>
-            <a:pPr lvl="2"/>
-            <a:endParaRPr lang="en-US"/>
-          </a:p>
-          <a:p>
-            <a:pPr lvl="2"/>
-            <a:endParaRPr lang="en-US" dirty="0"/>
-          </a:p>
-        </p:txBody>
-      </p:sp>
-      <p:pic>
-        <p:nvPicPr>
-          <p:cNvPr id="4" name="Picture 3">
-            <a:extLst>
-              <a:ext uri="{FF2B5EF4-FFF2-40B4-BE49-F238E27FC236}">
-                <a16:creationId xmlns:a16="http://schemas.microsoft.com/office/drawing/2014/main" id="{D72AA570-BCFF-596B-6F6B-BC10627B2089}"/>
-              </a:ext>
-            </a:extLst>
-          </p:cNvPr>
-          <p:cNvPicPr>
-            <a:picLocks noChangeAspect="1"/>
-          </p:cNvPicPr>
-          <p:nvPr/>
-        </p:nvPicPr>
-        <p:blipFill>
-          <a:blip r:embed="rId2"/>
-          <a:stretch>
-            <a:fillRect/>
-          </a:stretch>
-        </p:blipFill>
-        <p:spPr>
-          <a:xfrm>
-            <a:off x="1641398" y="4704589"/>
-            <a:ext cx="3378200" cy="1981200"/>
-          </a:xfrm>
-          <a:prstGeom prst="rect">
-            <a:avLst/>
-          </a:prstGeom>
-        </p:spPr>
-      </p:pic>
-      <p:pic>
-        <p:nvPicPr>
-          <p:cNvPr id="5" name="Picture 4">
-            <a:extLst>
-              <a:ext uri="{FF2B5EF4-FFF2-40B4-BE49-F238E27FC236}">
-                <a16:creationId xmlns:a16="http://schemas.microsoft.com/office/drawing/2014/main" id="{41B9AA04-C1C2-1DA2-FC92-D67C6D9F5F00}"/>
-              </a:ext>
-            </a:extLst>
-          </p:cNvPr>
-          <p:cNvPicPr>
-            <a:picLocks noChangeAspect="1"/>
-          </p:cNvPicPr>
-          <p:nvPr/>
-        </p:nvPicPr>
-        <p:blipFill>
-          <a:blip r:embed="rId3"/>
-          <a:srcRect t="6541" b="3473"/>
-          <a:stretch>
-            <a:fillRect/>
-          </a:stretch>
-        </p:blipFill>
-        <p:spPr>
-          <a:xfrm>
-            <a:off x="6639196" y="4749427"/>
-            <a:ext cx="4281415" cy="1746032"/>
-          </a:xfrm>
-          <a:prstGeom prst="rect">
-            <a:avLst/>
-          </a:prstGeom>
-        </p:spPr>
-      </p:pic>
+              <a:rPr lang="en-US" dirty="0"/>
+              <a:t>Utilize reputable journals within discipline as well as existing author guidelines for journals of interest</a:t>
+            </a:r>
+            <a:r>
+              <a:rPr lang="en-US" baseline="30000" dirty="0"/>
+              <a:t>2</a:t>
+            </a:r>
+            <a:endParaRPr lang="en-US" dirty="0"/>
+          </a:p>
+          <a:p>
+            <a:endParaRPr lang="en-US" dirty="0"/>
+          </a:p>
+        </p:txBody>
+      </p:sp>
     </p:spTree>
     <p:extLst>
       <p:ext uri="{BB962C8B-B14F-4D97-AF65-F5344CB8AC3E}">
-        <p14:creationId xmlns:p14="http://schemas.microsoft.com/office/powerpoint/2010/main" val="3164610408"/>
-      </p:ext>
-    </p:extLst>
-  </p:cSld>
-  <p:clrMapOvr>
-    <a:masterClrMapping/>
-  </p:clrMapOvr>
-  <p:timing>
-    <p:tnLst>
-      <p:par>
-        <p:cTn id="1" dur="indefinite" restart="never" nodeType="tmRoot">
-          <p:childTnLst>
-            <p:seq concurrent="1" nextAc="seek">
-              <p:cTn id="2" dur="indefinite" nodeType="mainSeq">
-                <p:childTnLst>
-                  <p:par>
-                    <p:cTn id="3" fill="hold">
-                      <p:stCondLst>
-                        <p:cond delay="indefinite"/>
-                      </p:stCondLst>
-                      <p:childTnLst>
-                        <p:par>
-                          <p:cTn id="4" fill="hold">
-                            <p:stCondLst>
-                              <p:cond delay="0"/>
-                            </p:stCondLst>
-                            <p:childTnLst>
-                              <p:par>
-                                <p:cTn id="5" presetID="1" presetClass="entr" presetSubtype="0" fill="hold" nodeType="clickEffect">
-                                  <p:stCondLst>
-                                    <p:cond delay="0"/>
-                                  </p:stCondLst>
-                                  <p:childTnLst>
-                                    <p:set>
-                                      <p:cBhvr>
-                                        <p:cTn id="6" dur="1" fill="hold">
-                                          <p:stCondLst>
-                                            <p:cond delay="0"/>
-                                          </p:stCondLst>
-                                        </p:cTn>
-                                        <p:tgtEl>
-                                          <p:spTgt spid="4"/>
-                                        </p:tgtEl>
-                                        <p:attrNameLst>
-                                          <p:attrName>style.visibility</p:attrName>
-                                        </p:attrNameLst>
-                                      </p:cBhvr>
-                                      <p:to>
-                                        <p:strVal val="visible"/>
-                                      </p:to>
-                                    </p:set>
-                                  </p:childTnLst>
-                                </p:cTn>
-                              </p:par>
-                            </p:childTnLst>
-                          </p:cTn>
-                        </p:par>
-                      </p:childTnLst>
-                    </p:cTn>
-                  </p:par>
-                  <p:par>
-                    <p:cTn id="7" fill="hold">
-                      <p:stCondLst>
-                        <p:cond delay="indefinite"/>
-                      </p:stCondLst>
-                      <p:childTnLst>
-                        <p:par>
-                          <p:cTn id="8" fill="hold">
-                            <p:stCondLst>
-                              <p:cond delay="0"/>
-                            </p:stCondLst>
-                            <p:childTnLst>
-                              <p:par>
-                                <p:cTn id="9" presetID="1" presetClass="entr" presetSubtype="0" fill="hold" nodeType="clickEffect">
-                                  <p:stCondLst>
-                                    <p:cond delay="0"/>
-                                  </p:stCondLst>
-                                  <p:childTnLst>
-                                    <p:set>
-                                      <p:cBhvr>
-                                        <p:cTn id="10" dur="1" fill="hold">
-                                          <p:stCondLst>
-                                            <p:cond delay="0"/>
-                                          </p:stCondLst>
-                                        </p:cTn>
-                                        <p:tgtEl>
-                                          <p:spTgt spid="5"/>
-                                        </p:tgtEl>
-                                        <p:attrNameLst>
-                                          <p:attrName>style.visibility</p:attrName>
-                                        </p:attrNameLst>
-                                      </p:cBhvr>
-                                      <p:to>
-                                        <p:strVal val="visible"/>
-                                      </p:to>
-                                    </p:set>
-                                  </p:childTnLst>
-                                </p:cTn>
-                              </p:par>
-                            </p:childTnLst>
-                          </p:cTn>
-                        </p:par>
-                      </p:childTnLst>
-                    </p:cTn>
-                  </p:par>
-                </p:childTnLst>
-              </p:cTn>
-              <p:prevCondLst>
-                <p:cond evt="onPrev" delay="0">
-                  <p:tgtEl>
-                    <p:sldTgt/>
-                  </p:tgtEl>
-                </p:cond>
-              </p:prevCondLst>
-              <p:nextCondLst>
-                <p:cond evt="onNext" delay="0">
-                  <p:tgtEl>
-                    <p:sldTgt/>
-                  </p:tgtEl>
-                </p:cond>
-              </p:nextCondLst>
-            </p:seq>
-          </p:childTnLst>
-        </p:cTn>
-      </p:par>
-    </p:tnLst>
-  </p:timing>
-</p:sld>
-</file>
-
-<file path=ppt/slides/slide13.xml><?xml version="1.0" encoding="utf-8"?>
-<p:sld xmlns:a="http://schemas.openxmlformats.org/drawingml/2006/main" xmlns:r="http://schemas.openxmlformats.org/officeDocument/2006/relationships" xmlns:p="http://schemas.openxmlformats.org/presentationml/2006/main">
-  <p:cSld>
-    <p:spTree>
-      <p:nvGrpSpPr>
-        <p:cNvPr id="1" name="">
-          <a:extLst>
-            <a:ext uri="{FF2B5EF4-FFF2-40B4-BE49-F238E27FC236}">
-              <a16:creationId xmlns:a16="http://schemas.microsoft.com/office/drawing/2014/main" id="{C0AAD607-BCA6-AB13-E955-32A8A6A2E0D5}"/>
-            </a:ext>
-          </a:extLst>
-        </p:cNvPr>
-        <p:cNvGrpSpPr/>
-        <p:nvPr/>
-      </p:nvGrpSpPr>
-      <p:grpSpPr>
-        <a:xfrm>
-          <a:off x="0" y="0"/>
-          <a:ext cx="0" cy="0"/>
-          <a:chOff x="0" y="0"/>
-          <a:chExt cx="0" cy="0"/>
-        </a:xfrm>
-      </p:grpSpPr>
-      <p:sp>
-        <p:nvSpPr>
-          <p:cNvPr id="2" name="Title 1">
-            <a:extLst>
-              <a:ext uri="{FF2B5EF4-FFF2-40B4-BE49-F238E27FC236}">
-                <a16:creationId xmlns:a16="http://schemas.microsoft.com/office/drawing/2014/main" id="{6CD2D5E3-EA84-5CE9-9988-D217E07700D8}"/>
-              </a:ext>
-            </a:extLst>
-          </p:cNvPr>
-          <p:cNvSpPr>
-            <a:spLocks noGrp="1"/>
-          </p:cNvSpPr>
-          <p:nvPr>
-            <p:ph type="title"/>
-          </p:nvPr>
-        </p:nvSpPr>
-        <p:spPr/>
-        <p:txBody>
-          <a:bodyPr/>
-          <a:lstStyle/>
-          <a:p>
-            <a:r>
-              <a:rPr lang="en-US" dirty="0"/>
-              <a:t>Effect Measure Modification </a:t>
-            </a:r>
-          </a:p>
-        </p:txBody>
-      </p:sp>
-      <p:sp>
-        <p:nvSpPr>
-          <p:cNvPr id="3" name="Content Placeholder 2">
-            <a:extLst>
-              <a:ext uri="{FF2B5EF4-FFF2-40B4-BE49-F238E27FC236}">
-                <a16:creationId xmlns:a16="http://schemas.microsoft.com/office/drawing/2014/main" id="{8E874C78-C887-F6AA-6F3B-1B586334D3FE}"/>
-              </a:ext>
-            </a:extLst>
-          </p:cNvPr>
-          <p:cNvSpPr>
-            <a:spLocks noGrp="1"/>
-          </p:cNvSpPr>
-          <p:nvPr>
-            <p:ph idx="1"/>
-          </p:nvPr>
-        </p:nvSpPr>
-        <p:spPr/>
-        <p:txBody>
-          <a:bodyPr>
-            <a:normAutofit/>
-          </a:bodyPr>
-          <a:lstStyle/>
-          <a:p>
-            <a:pPr lvl="1"/>
-            <a:r>
-              <a:rPr lang="en-US" dirty="0"/>
-              <a:t>EMM is scale dependent: additive, multiplicative </a:t>
-            </a:r>
-          </a:p>
-          <a:p>
-            <a:pPr lvl="2"/>
-            <a:r>
-              <a:rPr lang="en-US" dirty="0"/>
-              <a:t>Presentation of results depends on scale. </a:t>
-            </a:r>
-          </a:p>
-          <a:p>
-            <a:pPr lvl="2"/>
-            <a:r>
-              <a:rPr lang="en-US" dirty="0"/>
-              <a:t>Present relative risks (RRs), Ors or risk differences (RDs) with confidence intervals (Cis) for each stratum of A and X with a single reference category. </a:t>
-            </a:r>
-          </a:p>
-          <a:p>
-            <a:pPr lvl="3"/>
-            <a:r>
-              <a:rPr lang="en-US" dirty="0"/>
-              <a:t>Amongst females: the association of A=2 vs A1 was X% higher or lower </a:t>
-            </a:r>
-          </a:p>
-          <a:p>
-            <a:pPr lvl="3"/>
-            <a:r>
-              <a:rPr lang="en-US" dirty="0"/>
-              <a:t>Amongst males: the association of of A=2 vs A1 was X% higher or lower </a:t>
-            </a:r>
-          </a:p>
-          <a:p>
-            <a:pPr lvl="3"/>
-            <a:r>
-              <a:rPr lang="en-US" dirty="0"/>
-              <a:t>The association was stronger amongst females. </a:t>
-            </a:r>
-          </a:p>
-          <a:p>
-            <a:pPr lvl="2"/>
-            <a:endParaRPr lang="en-US" dirty="0"/>
-          </a:p>
-          <a:p>
-            <a:pPr lvl="2"/>
-            <a:endParaRPr lang="en-US" dirty="0"/>
-          </a:p>
-          <a:p>
-            <a:pPr lvl="2"/>
-            <a:endParaRPr lang="en-US" dirty="0"/>
-          </a:p>
-        </p:txBody>
-      </p:sp>
-    </p:spTree>
-    <p:extLst>
-      <p:ext uri="{BB962C8B-B14F-4D97-AF65-F5344CB8AC3E}">
-        <p14:creationId xmlns:p14="http://schemas.microsoft.com/office/powerpoint/2010/main" val="511751966"/>
-      </p:ext>
-    </p:extLst>
-  </p:cSld>
-  <p:clrMapOvr>
-    <a:masterClrMapping/>
-  </p:clrMapOvr>
-</p:sld>
-</file>
-
-<file path=ppt/slides/slide14.xml><?xml version="1.0" encoding="utf-8"?>
-<p:sld xmlns:a="http://schemas.openxmlformats.org/drawingml/2006/main" xmlns:r="http://schemas.openxmlformats.org/officeDocument/2006/relationships" xmlns:p="http://schemas.openxmlformats.org/presentationml/2006/main">
-  <p:cSld>
-    <p:bg>
-      <p:bgPr>
-        <a:solidFill>
-          <a:schemeClr val="bg1"/>
-        </a:solidFill>
-        <a:effectLst/>
-      </p:bgPr>
-    </p:bg>
-    <p:spTree>
-      <p:nvGrpSpPr>
-        <p:cNvPr id="1" name="">
-          <a:extLst>
-            <a:ext uri="{FF2B5EF4-FFF2-40B4-BE49-F238E27FC236}">
-              <a16:creationId xmlns:a16="http://schemas.microsoft.com/office/drawing/2014/main" id="{4116A3C0-ED17-E2E0-EE12-CE456692C94E}"/>
-            </a:ext>
-          </a:extLst>
-        </p:cNvPr>
-        <p:cNvGrpSpPr/>
-        <p:nvPr/>
-      </p:nvGrpSpPr>
-      <p:grpSpPr>
-        <a:xfrm>
-          <a:off x="0" y="0"/>
-          <a:ext cx="0" cy="0"/>
-          <a:chOff x="0" y="0"/>
-          <a:chExt cx="0" cy="0"/>
-        </a:xfrm>
-      </p:grpSpPr>
-      <p:sp useBgFill="1">
-        <p:nvSpPr>
-          <p:cNvPr id="11" name="Rectangle 10">
-            <a:extLst>
-              <a:ext uri="{FF2B5EF4-FFF2-40B4-BE49-F238E27FC236}">
-                <a16:creationId xmlns:a16="http://schemas.microsoft.com/office/drawing/2014/main" id="{EC7FF834-B204-4967-8D47-8BB36EAF0EF5}"/>
-              </a:ext>
-              <a:ext uri="{C183D7F6-B498-43B3-948B-1728B52AA6E4}">
-                <adec:decorative xmlns:adec="http://schemas.microsoft.com/office/drawing/2017/decorative" val="1"/>
-              </a:ext>
-            </a:extLst>
-          </p:cNvPr>
-          <p:cNvSpPr>
-            <a:spLocks noGrp="1" noRot="1" noChangeAspect="1" noMove="1" noResize="1" noEditPoints="1" noAdjustHandles="1" noChangeArrowheads="1" noChangeShapeType="1" noTextEdit="1"/>
-          </p:cNvSpPr>
-          <p:nvPr>
-            <p:extLst>
-              <p:ext uri="{386F3935-93C4-4BCD-93E2-E3B085C9AB24}">
-                <p16:designElem xmlns:p16="http://schemas.microsoft.com/office/powerpoint/2015/main" val="1"/>
-              </p:ext>
-            </p:extLst>
-          </p:nvPr>
-        </p:nvSpPr>
-        <p:spPr>
-          <a:xfrm>
-            <a:off x="0" y="-2"/>
-            <a:ext cx="12192000" cy="6858002"/>
-          </a:xfrm>
-          <a:prstGeom prst="rect">
-            <a:avLst/>
-          </a:prstGeom>
-          <a:ln>
-            <a:noFill/>
-          </a:ln>
-        </p:spPr>
-        <p:style>
-          <a:lnRef idx="2">
-            <a:schemeClr val="accent1">
-              <a:shade val="50000"/>
-            </a:schemeClr>
-          </a:lnRef>
-          <a:fillRef idx="1">
-            <a:schemeClr val="accent1"/>
-          </a:fillRef>
-          <a:effectRef idx="0">
-            <a:schemeClr val="accent1"/>
-          </a:effectRef>
-          <a:fontRef idx="minor">
-            <a:schemeClr val="lt1"/>
-          </a:fontRef>
-        </p:style>
-        <p:txBody>
-          <a:bodyPr rtlCol="0" anchor="ctr"/>
-          <a:lstStyle/>
-          <a:p>
-            <a:pPr algn="ctr"/>
-            <a:endParaRPr lang="en-US"/>
-          </a:p>
-        </p:txBody>
-      </p:sp>
-      <p:sp>
-        <p:nvSpPr>
-          <p:cNvPr id="13" name="Rectangle 12">
-            <a:extLst>
-              <a:ext uri="{FF2B5EF4-FFF2-40B4-BE49-F238E27FC236}">
-                <a16:creationId xmlns:a16="http://schemas.microsoft.com/office/drawing/2014/main" id="{F780A22D-61EA-43E3-BD94-3E39CF902160}"/>
-              </a:ext>
-              <a:ext uri="{C183D7F6-B498-43B3-948B-1728B52AA6E4}">
-                <adec:decorative xmlns:adec="http://schemas.microsoft.com/office/drawing/2017/decorative" val="1"/>
-              </a:ext>
-            </a:extLst>
-          </p:cNvPr>
-          <p:cNvSpPr>
-            <a:spLocks noGrp="1" noRot="1" noChangeAspect="1" noMove="1" noResize="1" noEditPoints="1" noAdjustHandles="1" noChangeArrowheads="1" noChangeShapeType="1" noTextEdit="1"/>
-          </p:cNvSpPr>
-          <p:nvPr>
-            <p:extLst>
-              <p:ext uri="{386F3935-93C4-4BCD-93E2-E3B085C9AB24}">
-                <p16:designElem xmlns:p16="http://schemas.microsoft.com/office/powerpoint/2015/main" val="1"/>
-              </p:ext>
-            </p:extLst>
-          </p:nvPr>
-        </p:nvSpPr>
-        <p:spPr>
-          <a:xfrm>
-            <a:off x="0" y="4918509"/>
-            <a:ext cx="12192000" cy="1939491"/>
-          </a:xfrm>
-          <a:prstGeom prst="rect">
-            <a:avLst/>
-          </a:prstGeom>
-          <a:solidFill>
-            <a:schemeClr val="accent2"/>
-          </a:solidFill>
-          <a:ln>
-            <a:noFill/>
-          </a:ln>
-        </p:spPr>
-        <p:style>
-          <a:lnRef idx="2">
-            <a:schemeClr val="accent1">
-              <a:shade val="50000"/>
-            </a:schemeClr>
-          </a:lnRef>
-          <a:fillRef idx="1">
-            <a:schemeClr val="accent1"/>
-          </a:fillRef>
-          <a:effectRef idx="0">
-            <a:schemeClr val="accent1"/>
-          </a:effectRef>
-          <a:fontRef idx="minor">
-            <a:schemeClr val="lt1"/>
-          </a:fontRef>
-        </p:style>
-        <p:txBody>
-          <a:bodyPr rtlCol="0" anchor="ctr"/>
-          <a:lstStyle/>
-          <a:p>
-            <a:pPr algn="ctr"/>
-            <a:endParaRPr lang="en-US"/>
-          </a:p>
-        </p:txBody>
-      </p:sp>
-      <p:sp>
-        <p:nvSpPr>
-          <p:cNvPr id="2" name="Title 1">
-            <a:extLst>
-              <a:ext uri="{FF2B5EF4-FFF2-40B4-BE49-F238E27FC236}">
-                <a16:creationId xmlns:a16="http://schemas.microsoft.com/office/drawing/2014/main" id="{4DFB32C3-230E-5BF2-79D6-862A1B8F94FA}"/>
-              </a:ext>
-            </a:extLst>
-          </p:cNvPr>
-          <p:cNvSpPr>
-            <a:spLocks noGrp="1"/>
-          </p:cNvSpPr>
-          <p:nvPr>
-            <p:ph type="title"/>
-          </p:nvPr>
-        </p:nvSpPr>
-        <p:spPr>
-          <a:xfrm>
-            <a:off x="1600200" y="4269282"/>
-            <a:ext cx="8991600" cy="1264762"/>
-          </a:xfrm>
-        </p:spPr>
-        <p:txBody>
-          <a:bodyPr vert="horz" lIns="274320" tIns="182880" rIns="274320" bIns="182880" rtlCol="0" anchor="ctr" anchorCtr="1">
-            <a:normAutofit/>
-          </a:bodyPr>
-          <a:lstStyle/>
-          <a:p>
-            <a:r>
-              <a:rPr lang="en-US" sz="3200"/>
-              <a:t>Practice</a:t>
-            </a:r>
-            <a:endParaRPr lang="en-US" sz="3200" dirty="0"/>
-          </a:p>
-        </p:txBody>
-      </p:sp>
-      <p:pic>
-        <p:nvPicPr>
-          <p:cNvPr id="6" name="Picture 5">
-            <a:extLst>
-              <a:ext uri="{FF2B5EF4-FFF2-40B4-BE49-F238E27FC236}">
-                <a16:creationId xmlns:a16="http://schemas.microsoft.com/office/drawing/2014/main" id="{B146464C-C1E0-1C22-A5E0-E8E95A078A8F}"/>
-              </a:ext>
-            </a:extLst>
-          </p:cNvPr>
-          <p:cNvPicPr>
-            <a:picLocks noChangeAspect="1"/>
-          </p:cNvPicPr>
-          <p:nvPr/>
-        </p:nvPicPr>
-        <p:blipFill>
-          <a:blip r:embed="rId2"/>
-          <a:stretch>
-            <a:fillRect/>
-          </a:stretch>
-        </p:blipFill>
-        <p:spPr>
-          <a:xfrm>
-            <a:off x="635267" y="980157"/>
-            <a:ext cx="10921466" cy="2621149"/>
-          </a:xfrm>
-          <a:prstGeom prst="rect">
-            <a:avLst/>
-          </a:prstGeom>
-        </p:spPr>
-      </p:pic>
-    </p:spTree>
-    <p:extLst>
-      <p:ext uri="{BB962C8B-B14F-4D97-AF65-F5344CB8AC3E}">
-        <p14:creationId xmlns:p14="http://schemas.microsoft.com/office/powerpoint/2010/main" val="1387124750"/>
+        <p14:creationId xmlns:p14="http://schemas.microsoft.com/office/powerpoint/2010/main" val="3662168383"/>
       </p:ext>
     </p:extLst>
   </p:cSld>
@@ -4340,32 +4436,69 @@
         </p:nvSpPr>
         <p:spPr/>
         <p:txBody>
-          <a:bodyPr/>
-          <a:lstStyle/>
-          <a:p>
-            <a:r>
-              <a:rPr lang="en-US" dirty="0"/>
-              <a:t>Report findings of study in context of primary research question </a:t>
-            </a:r>
-          </a:p>
-          <a:p>
-            <a:r>
-              <a:rPr lang="en-US" dirty="0"/>
-              <a:t>Presented in logical sequence without bias or interpretation </a:t>
-            </a:r>
-          </a:p>
-          <a:p>
-            <a:r>
-              <a:rPr lang="en-US" dirty="0"/>
-              <a:t>Effective results section presents findings by solely stating facts </a:t>
+          <a:bodyPr>
+            <a:normAutofit/>
+          </a:bodyPr>
+          <a:lstStyle/>
+          <a:p>
+            <a:r>
+              <a:rPr lang="en-US" sz="2000" dirty="0"/>
+              <a:t>Provide reader with a clear understanding of the research study including the “research question, the scope, rationale, aims and objectives of study.”</a:t>
+            </a:r>
+            <a:r>
+              <a:rPr lang="en-US" sz="2000" baseline="30000" dirty="0"/>
+              <a:t>1</a:t>
             </a:r>
           </a:p>
           <a:p>
             <a:pPr lvl="1"/>
             <a:r>
-              <a:rPr lang="en-US" dirty="0"/>
-              <a:t>Reserves interpretation for discussion section </a:t>
-            </a:r>
+              <a:rPr lang="en-US" sz="1800" dirty="0"/>
+              <a:t>Seeks to answer questions related to </a:t>
+            </a:r>
+            <a:r>
+              <a:rPr lang="en-US" sz="1800" b="1" dirty="0"/>
+              <a:t>what the author is writing about</a:t>
+            </a:r>
+            <a:r>
+              <a:rPr lang="en-US" sz="1800" dirty="0"/>
+              <a:t>, </a:t>
+            </a:r>
+            <a:r>
+              <a:rPr lang="en-US" sz="1800" b="1" dirty="0"/>
+              <a:t>why it is important </a:t>
+            </a:r>
+            <a:r>
+              <a:rPr lang="en-US" sz="1800" dirty="0"/>
+              <a:t>and </a:t>
+            </a:r>
+            <a:r>
+              <a:rPr lang="en-US" sz="1800" b="1" dirty="0"/>
+              <a:t>what the reader should know about it</a:t>
+            </a:r>
+            <a:r>
+              <a:rPr lang="en-US" sz="1800" b="1" baseline="30000" dirty="0"/>
+              <a:t>2</a:t>
+            </a:r>
+            <a:r>
+              <a:rPr lang="en-US" sz="1800" dirty="0"/>
+              <a:t>. </a:t>
+            </a:r>
+          </a:p>
+          <a:p>
+            <a:r>
+              <a:rPr lang="en-US" sz="2000" dirty="0"/>
+              <a:t>Desired outcome: encourages the audience to read your work and better understand it</a:t>
+            </a:r>
+            <a:r>
+              <a:rPr lang="en-US" sz="2000" baseline="30000" dirty="0"/>
+              <a:t>2</a:t>
+            </a:r>
+            <a:r>
+              <a:rPr lang="en-US" sz="2000" dirty="0"/>
+              <a:t>.  </a:t>
+            </a:r>
+            <a:endParaRPr lang="en-US" dirty="0"/>
           </a:p>
         </p:txBody>
       </p:sp>
@@ -4456,32 +4589,100 @@
           <a:p>
             <a:r>
               <a:rPr lang="en-US" dirty="0"/>
-              <a:t>Factual statements supported by evidence. Short and sweet without excess words</a:t>
-            </a:r>
-          </a:p>
-          <a:p>
-            <a:r>
-              <a:rPr lang="en-US" dirty="0"/>
-              <a:t>Present representative data rather than endlessly repetitive data</a:t>
-            </a:r>
-          </a:p>
-          <a:p>
-            <a:r>
-              <a:rPr lang="en-US" dirty="0"/>
-              <a:t>Discuss variables only if they had an effect (positive or negative)</a:t>
-            </a:r>
-          </a:p>
-          <a:p>
-            <a:r>
-              <a:rPr lang="en-US" dirty="0"/>
-              <a:t>Use meaningful statistics</a:t>
-            </a:r>
-          </a:p>
-          <a:p>
-            <a:r>
-              <a:rPr lang="en-US" dirty="0"/>
-              <a:t>Avoid redundancy. If it is in the tables or captions you may not need to repeat it</a:t>
-            </a:r>
+              <a:t>Establishment of topic through brief overview of research topic</a:t>
+            </a:r>
+            <a:r>
+              <a:rPr lang="en-US" baseline="30000" dirty="0"/>
+              <a:t>2</a:t>
+            </a:r>
+            <a:endParaRPr lang="en-US" dirty="0"/>
+          </a:p>
+          <a:p>
+            <a:r>
+              <a:rPr lang="en-US" dirty="0"/>
+              <a:t>Provide essential information to:  </a:t>
+            </a:r>
+            <a:r>
+              <a:rPr lang="en-US" u="sng" dirty="0"/>
+              <a:t>introduce</a:t>
+            </a:r>
+            <a:r>
+              <a:rPr lang="en-US" dirty="0"/>
+              <a:t> </a:t>
+            </a:r>
+            <a:r>
+              <a:rPr lang="en-US" b="1" dirty="0"/>
+              <a:t>a research topic</a:t>
+            </a:r>
+            <a:r>
+              <a:rPr lang="en-US" dirty="0"/>
+              <a:t>, </a:t>
+            </a:r>
+            <a:r>
+              <a:rPr lang="en-US" u="sng" dirty="0"/>
+              <a:t>introduce</a:t>
+            </a:r>
+            <a:r>
+              <a:rPr lang="en-US" dirty="0"/>
+              <a:t> a </a:t>
+            </a:r>
+            <a:r>
+              <a:rPr lang="en-US" b="1" dirty="0"/>
+              <a:t>research question related to topic</a:t>
+            </a:r>
+            <a:r>
+              <a:rPr lang="en-US" dirty="0"/>
+              <a:t>, </a:t>
+            </a:r>
+            <a:r>
+              <a:rPr lang="en-US" u="sng" dirty="0"/>
+              <a:t>introduce</a:t>
+            </a:r>
+            <a:r>
+              <a:rPr lang="en-US" dirty="0"/>
+              <a:t> and </a:t>
+            </a:r>
+            <a:r>
+              <a:rPr lang="en-US" u="sng" dirty="0"/>
+              <a:t>outline</a:t>
+            </a:r>
+            <a:r>
+              <a:rPr lang="en-US" dirty="0"/>
+              <a:t> </a:t>
+            </a:r>
+            <a:r>
+              <a:rPr lang="en-US" b="1" dirty="0"/>
+              <a:t>intended scope of research study to address said question</a:t>
+            </a:r>
+            <a:r>
+              <a:rPr lang="en-US" b="1" baseline="30000" dirty="0"/>
+              <a:t>1</a:t>
+            </a:r>
+            <a:r>
+              <a:rPr lang="en-US" b="1" dirty="0"/>
+              <a:t> </a:t>
+            </a:r>
+          </a:p>
+          <a:p>
+            <a:r>
+              <a:rPr lang="en-US" b="1" dirty="0"/>
+              <a:t>Not: </a:t>
+            </a:r>
+            <a:r>
+              <a:rPr lang="en-US" dirty="0"/>
+              <a:t>In depth-review of background literature, study design, or analysis plan</a:t>
+            </a:r>
+            <a:r>
+              <a:rPr lang="en-US" baseline="30000" dirty="0"/>
+              <a:t>1-2</a:t>
+            </a:r>
+            <a:r>
+              <a:rPr lang="en-US" dirty="0"/>
+              <a:t>. </a:t>
+            </a:r>
+          </a:p>
+          <a:p>
+            <a:endParaRPr lang="en-US" dirty="0"/>
           </a:p>
         </p:txBody>
       </p:sp>
@@ -4506,7 +4707,7 @@
         <p:cNvPr id="1" name="">
           <a:extLst>
             <a:ext uri="{FF2B5EF4-FFF2-40B4-BE49-F238E27FC236}">
-              <a16:creationId xmlns:a16="http://schemas.microsoft.com/office/drawing/2014/main" id="{478D3C30-B7DE-68A2-41C1-8C5FB9AA2DA0}"/>
+              <a16:creationId xmlns:a16="http://schemas.microsoft.com/office/drawing/2014/main" id="{BF2A3E5E-E353-4859-69B2-CC782FB31CC6}"/>
             </a:ext>
           </a:extLst>
         </p:cNvPr>
@@ -4526,7 +4727,7 @@
           <p:cNvPr id="2" name="Title 1">
             <a:extLst>
               <a:ext uri="{FF2B5EF4-FFF2-40B4-BE49-F238E27FC236}">
-                <a16:creationId xmlns:a16="http://schemas.microsoft.com/office/drawing/2014/main" id="{F2646216-4B21-BE97-C0C5-0A0448CC1BAF}"/>
+                <a16:creationId xmlns:a16="http://schemas.microsoft.com/office/drawing/2014/main" id="{BF726CA4-80DB-C61C-112F-728AD73A1578}"/>
               </a:ext>
             </a:extLst>
           </p:cNvPr>
@@ -4551,10 +4752,10 @@
       </p:sp>
       <p:sp>
         <p:nvSpPr>
-          <p:cNvPr id="3" name="Content Placeholder 2">
+          <p:cNvPr id="4" name="Content Placeholder 2">
             <a:extLst>
               <a:ext uri="{FF2B5EF4-FFF2-40B4-BE49-F238E27FC236}">
-                <a16:creationId xmlns:a16="http://schemas.microsoft.com/office/drawing/2014/main" id="{659D29BF-F008-C268-EF6F-67ED3C36E9FA}"/>
+                <a16:creationId xmlns:a16="http://schemas.microsoft.com/office/drawing/2014/main" id="{A38CF4F3-BC3B-02C6-7F8C-A5353A26457E}"/>
               </a:ext>
             </a:extLst>
           </p:cNvPr>
@@ -4565,99 +4766,176 @@
             <p:ph idx="1"/>
           </p:nvPr>
         </p:nvSpPr>
-        <p:spPr/>
-        <p:txBody>
-          <a:bodyPr/>
-          <a:lstStyle/>
-          <a:p>
-            <a:r>
-              <a:rPr lang="en-US" dirty="0"/>
-              <a:t>Present results in logical order prioritizing presentation in order of complexity </a:t>
-            </a:r>
-          </a:p>
-          <a:p>
-            <a:pPr lvl="1"/>
-            <a:r>
-              <a:rPr lang="en-US" dirty="0"/>
-              <a:t>Univariate</a:t>
-            </a:r>
-            <a:r>
-              <a:rPr lang="en-US" dirty="0">
+        <p:spPr>
+          <a:xfrm>
+            <a:off x="2231136" y="2390762"/>
+            <a:ext cx="7303317" cy="4155142"/>
+          </a:xfrm>
+        </p:spPr>
+        <p:txBody>
+          <a:bodyPr>
+            <a:normAutofit/>
+          </a:bodyPr>
+          <a:lstStyle/>
+          <a:p>
+            <a:pPr marL="0" indent="0">
+              <a:lnSpc>
+                <a:spcPct val="90000"/>
+              </a:lnSpc>
+              <a:buNone/>
+            </a:pPr>
+            <a:r>
+              <a:rPr lang="en-US" sz="2200" dirty="0"/>
+              <a:t>Establishment of topic through three-pronged approach</a:t>
+            </a:r>
+            <a:r>
+              <a:rPr lang="en-US" sz="2200" baseline="30000" dirty="0"/>
+              <a:t>2 </a:t>
+            </a:r>
+            <a:r>
+              <a:rPr lang="en-US" sz="2200" dirty="0"/>
+              <a:t> </a:t>
+            </a:r>
+          </a:p>
+          <a:p>
+            <a:pPr marL="571500" lvl="1" indent="-342900">
+              <a:lnSpc>
+                <a:spcPct val="90000"/>
+              </a:lnSpc>
+              <a:buFont typeface="+mj-lt"/>
+              <a:buAutoNum type="arabicPeriod"/>
+            </a:pPr>
+            <a:r>
+              <a:rPr lang="en-US" sz="1900" dirty="0">
                 <a:sym typeface="Wingdings" pitchFamily="2" charset="2"/>
               </a:rPr>
-              <a:t> Bivariate </a:t>
-            </a:r>
-            <a:r>
-              <a:rPr lang="en-US" dirty="0" err="1">
+              <a:t>Focus and scope </a:t>
+            </a:r>
+          </a:p>
+          <a:p>
+            <a:pPr marL="571500" lvl="1" indent="-342900">
+              <a:lnSpc>
+                <a:spcPct val="90000"/>
+              </a:lnSpc>
+              <a:buFont typeface="+mj-lt"/>
+              <a:buAutoNum type="arabicPeriod"/>
+            </a:pPr>
+            <a:r>
+              <a:rPr lang="en-US" sz="1900" dirty="0">
                 <a:sym typeface="Wingdings" pitchFamily="2" charset="2"/>
               </a:rPr>
-              <a:t>MultivariateHigher</a:t>
-            </a:r>
-            <a:r>
-              <a:rPr lang="en-US" dirty="0">
+              <a:t>Problem statement </a:t>
+            </a:r>
+          </a:p>
+          <a:p>
+            <a:pPr marL="571500" lvl="1" indent="-342900">
+              <a:lnSpc>
+                <a:spcPct val="90000"/>
+              </a:lnSpc>
+              <a:buFont typeface="+mj-lt"/>
+              <a:buAutoNum type="arabicPeriod"/>
+            </a:pPr>
+            <a:r>
+              <a:rPr lang="en-US" sz="1900" dirty="0">
                 <a:sym typeface="Wingdings" pitchFamily="2" charset="2"/>
               </a:rPr>
-              <a:t> Order </a:t>
-            </a:r>
-          </a:p>
-          <a:p>
-            <a:pPr lvl="1"/>
-            <a:r>
-              <a:rPr lang="en-US" dirty="0">
+              <a:t>Specific research questions, hypothesis or objectives </a:t>
+            </a:r>
+          </a:p>
+          <a:p>
+            <a:pPr lvl="1">
+              <a:lnSpc>
+                <a:spcPct val="90000"/>
+              </a:lnSpc>
+            </a:pPr>
+            <a:endParaRPr lang="en-US" sz="1900" dirty="0">
+              <a:sym typeface="Wingdings" pitchFamily="2" charset="2"/>
+            </a:endParaRPr>
+          </a:p>
+          <a:p>
+            <a:pPr>
+              <a:lnSpc>
+                <a:spcPct val="90000"/>
+              </a:lnSpc>
+            </a:pPr>
+            <a:r>
+              <a:rPr lang="en-US" sz="2200" i="1" dirty="0">
                 <a:sym typeface="Wingdings" pitchFamily="2" charset="2"/>
               </a:rPr>
-              <a:t>Note that logical order may sometimes deviate from chronological order </a:t>
-            </a:r>
-          </a:p>
-          <a:p>
-            <a:pPr lvl="1"/>
-            <a:r>
-              <a:rPr lang="en-US" dirty="0">
+              <a:t>Alternatively viewed as</a:t>
+            </a:r>
+            <a:r>
+              <a:rPr lang="en-US" sz="2200" i="1" baseline="30000" dirty="0">
                 <a:sym typeface="Wingdings" pitchFamily="2" charset="2"/>
               </a:rPr>
-              <a:t>Number tables and figures separately beginning with the number one. </a:t>
-            </a:r>
-          </a:p>
-          <a:p>
-            <a:pPr lvl="1"/>
-            <a:r>
-              <a:rPr lang="en-US" dirty="0">
+              <a:t>3</a:t>
+            </a:r>
+            <a:r>
+              <a:rPr lang="en-US" sz="2200" i="1" dirty="0">
                 <a:sym typeface="Wingdings" pitchFamily="2" charset="2"/>
               </a:rPr>
-              <a:t>Paragraphs should flow in similar manner </a:t>
-            </a:r>
-          </a:p>
-          <a:p>
-            <a:pPr lvl="2"/>
-            <a:r>
-              <a:rPr lang="en-US" dirty="0">
+              <a:t>:</a:t>
+            </a:r>
+          </a:p>
+          <a:p>
+            <a:pPr marL="571500" lvl="1" indent="-342900">
+              <a:lnSpc>
+                <a:spcPct val="90000"/>
+              </a:lnSpc>
+              <a:buFont typeface="+mj-lt"/>
+              <a:buAutoNum type="arabicPeriod"/>
+            </a:pPr>
+            <a:r>
+              <a:rPr lang="en-US" sz="1900" dirty="0">
                 <a:sym typeface="Wingdings" pitchFamily="2" charset="2"/>
               </a:rPr>
-              <a:t>Topic sentence </a:t>
-            </a:r>
-          </a:p>
-          <a:p>
-            <a:pPr lvl="2"/>
-            <a:r>
-              <a:rPr lang="en-US" dirty="0">
+              <a:t>Background contextualization </a:t>
+            </a:r>
+          </a:p>
+          <a:p>
+            <a:pPr marL="571500" lvl="1" indent="-342900">
+              <a:lnSpc>
+                <a:spcPct val="90000"/>
+              </a:lnSpc>
+              <a:buFont typeface="+mj-lt"/>
+              <a:buAutoNum type="arabicPeriod"/>
+            </a:pPr>
+            <a:r>
+              <a:rPr lang="en-US" sz="1900" dirty="0">
                 <a:sym typeface="Wingdings" pitchFamily="2" charset="2"/>
               </a:rPr>
-              <a:t>Presentation of measure of association and measure of certainty (OR [95%CI])</a:t>
-            </a:r>
-          </a:p>
-          <a:p>
-            <a:pPr lvl="2"/>
-            <a:r>
-              <a:rPr lang="en-US" dirty="0">
+              <a:t>Statement of problem </a:t>
+            </a:r>
+          </a:p>
+          <a:p>
+            <a:pPr marL="571500" lvl="1" indent="-342900">
+              <a:lnSpc>
+                <a:spcPct val="90000"/>
+              </a:lnSpc>
+              <a:buFont typeface="+mj-lt"/>
+              <a:buAutoNum type="arabicPeriod"/>
+            </a:pPr>
+            <a:r>
+              <a:rPr lang="en-US" sz="1900" dirty="0">
                 <a:sym typeface="Wingdings" pitchFamily="2" charset="2"/>
               </a:rPr>
-              <a:t>Keep outcome with its data </a:t>
-            </a:r>
-          </a:p>
-          <a:p>
-            <a:endParaRPr lang="en-US" dirty="0"/>
-          </a:p>
-          <a:p>
+              <a:t>Response to the problem </a:t>
+            </a:r>
+          </a:p>
+          <a:p>
+            <a:pPr>
+              <a:lnSpc>
+                <a:spcPct val="90000"/>
+              </a:lnSpc>
+            </a:pPr>
+            <a:endParaRPr lang="en-US" sz="2200" dirty="0"/>
+          </a:p>
+          <a:p>
+            <a:pPr>
+              <a:lnSpc>
+                <a:spcPct val="90000"/>
+              </a:lnSpc>
+            </a:pPr>
             <a:endParaRPr lang="en-US" dirty="0"/>
           </a:p>
         </p:txBody>
@@ -4665,7 +4943,7 @@
     </p:spTree>
     <p:extLst>
       <p:ext uri="{BB962C8B-B14F-4D97-AF65-F5344CB8AC3E}">
-        <p14:creationId xmlns:p14="http://schemas.microsoft.com/office/powerpoint/2010/main" val="2613098295"/>
+        <p14:creationId xmlns:p14="http://schemas.microsoft.com/office/powerpoint/2010/main" val="275104565"/>
       </p:ext>
     </p:extLst>
   </p:cSld>
@@ -4678,6 +4956,16 @@
 <file path=ppt/slides/slide5.xml><?xml version="1.0" encoding="utf-8"?>
 <p:sld xmlns:a="http://schemas.openxmlformats.org/drawingml/2006/main" xmlns:r="http://schemas.openxmlformats.org/officeDocument/2006/relationships" xmlns:p="http://schemas.openxmlformats.org/presentationml/2006/main">
   <p:cSld>
+    <p:bg>
+      <p:bgPr>
+        <a:solidFill>
+          <a:schemeClr val="bg1">
+            <a:lumMod val="95000"/>
+          </a:schemeClr>
+        </a:solidFill>
+        <a:effectLst/>
+      </p:bgPr>
+    </p:bg>
     <p:spTree>
       <p:nvGrpSpPr>
         <p:cNvPr id="1" name=""/>
@@ -4697,7 +4985,7 @@
           <p:cNvPr id="2" name="Title 1">
             <a:extLst>
               <a:ext uri="{FF2B5EF4-FFF2-40B4-BE49-F238E27FC236}">
-                <a16:creationId xmlns:a16="http://schemas.microsoft.com/office/drawing/2014/main" id="{55F4D700-2380-B451-486B-B5EF644B0D47}"/>
+                <a16:creationId xmlns:a16="http://schemas.microsoft.com/office/drawing/2014/main" id="{76FC50F7-B9B0-6938-E269-893390ECEE00}"/>
               </a:ext>
             </a:extLst>
           </p:cNvPr>
@@ -4708,24 +4996,31 @@
             <p:ph type="title"/>
           </p:nvPr>
         </p:nvSpPr>
-        <p:spPr/>
-        <p:txBody>
-          <a:bodyPr/>
-          <a:lstStyle/>
-          <a:p>
-            <a:r>
-              <a:rPr lang="en-US" dirty="0"/>
-              <a:t>Descriptive Analysis </a:t>
-            </a:r>
-          </a:p>
-        </p:txBody>
-      </p:sp>
-      <p:sp>
-        <p:nvSpPr>
-          <p:cNvPr id="3" name="Content Placeholder 2">
+        <p:spPr>
+          <a:xfrm>
+            <a:off x="804672" y="964692"/>
+            <a:ext cx="5894832" cy="1188720"/>
+          </a:xfrm>
+        </p:spPr>
+        <p:txBody>
+          <a:bodyPr>
+            <a:normAutofit/>
+          </a:bodyPr>
+          <a:lstStyle/>
+          <a:p>
+            <a:r>
+              <a:rPr lang="en-US" dirty="0"/>
+              <a:t>Structure </a:t>
+            </a:r>
+          </a:p>
+        </p:txBody>
+      </p:sp>
+      <p:sp>
+        <p:nvSpPr>
+          <p:cNvPr id="4" name="Content Placeholder 2">
             <a:extLst>
               <a:ext uri="{FF2B5EF4-FFF2-40B4-BE49-F238E27FC236}">
-                <a16:creationId xmlns:a16="http://schemas.microsoft.com/office/drawing/2014/main" id="{0EFF4239-2957-1E32-FAB4-93CC29239CA2}"/>
+                <a16:creationId xmlns:a16="http://schemas.microsoft.com/office/drawing/2014/main" id="{2B095110-D70B-EEB3-9CA0-6D714B726D74}"/>
               </a:ext>
             </a:extLst>
           </p:cNvPr>
@@ -4736,422 +5031,77 @@
             <p:ph idx="1"/>
           </p:nvPr>
         </p:nvSpPr>
-        <p:spPr/>
-        <p:txBody>
-          <a:bodyPr/>
-          <a:lstStyle/>
-          <a:p>
-            <a:r>
-              <a:rPr lang="en-US" dirty="0"/>
-              <a:t>”Help put study into context” </a:t>
-            </a:r>
-          </a:p>
-          <a:p>
-            <a:r>
-              <a:rPr lang="en-US" dirty="0"/>
-              <a:t>Seeks to describe analytic population from which you are making inferences </a:t>
-            </a:r>
-          </a:p>
-          <a:p>
-            <a:endParaRPr lang="en-US" dirty="0"/>
-          </a:p>
-        </p:txBody>
-      </p:sp>
-    </p:spTree>
-    <p:extLst>
-      <p:ext uri="{BB962C8B-B14F-4D97-AF65-F5344CB8AC3E}">
-        <p14:creationId xmlns:p14="http://schemas.microsoft.com/office/powerpoint/2010/main" val="580720199"/>
-      </p:ext>
-    </p:extLst>
-  </p:cSld>
-  <p:clrMapOvr>
-    <a:masterClrMapping/>
-  </p:clrMapOvr>
-</p:sld>
-</file>
-
-<file path=ppt/slides/slide6.xml><?xml version="1.0" encoding="utf-8"?>
-<p:sld xmlns:a="http://schemas.openxmlformats.org/drawingml/2006/main" xmlns:r="http://schemas.openxmlformats.org/officeDocument/2006/relationships" xmlns:p="http://schemas.openxmlformats.org/presentationml/2006/main">
-  <p:cSld>
-    <p:spTree>
-      <p:nvGrpSpPr>
-        <p:cNvPr id="1" name="">
-          <a:extLst>
-            <a:ext uri="{FF2B5EF4-FFF2-40B4-BE49-F238E27FC236}">
-              <a16:creationId xmlns:a16="http://schemas.microsoft.com/office/drawing/2014/main" id="{7EE10550-4212-1EF4-4547-CB96BDA0C12F}"/>
-            </a:ext>
-          </a:extLst>
-        </p:cNvPr>
-        <p:cNvGrpSpPr/>
-        <p:nvPr/>
-      </p:nvGrpSpPr>
-      <p:grpSpPr>
-        <a:xfrm>
-          <a:off x="0" y="0"/>
-          <a:ext cx="0" cy="0"/>
-          <a:chOff x="0" y="0"/>
-          <a:chExt cx="0" cy="0"/>
-        </a:xfrm>
-      </p:grpSpPr>
-      <p:sp>
-        <p:nvSpPr>
-          <p:cNvPr id="2" name="Title 1">
+        <p:spPr>
+          <a:xfrm>
+            <a:off x="698128" y="2638044"/>
+            <a:ext cx="6107920" cy="3263206"/>
+          </a:xfrm>
+        </p:spPr>
+        <p:txBody>
+          <a:bodyPr>
+            <a:normAutofit/>
+          </a:bodyPr>
+          <a:lstStyle/>
+          <a:p>
+            <a:r>
+              <a:rPr lang="en-US" sz="2000" dirty="0"/>
+              <a:t>Often viewed as </a:t>
+            </a:r>
+            <a:r>
+              <a:rPr lang="en-US" sz="2000" b="1" dirty="0"/>
+              <a:t>inverted triangle </a:t>
+            </a:r>
+            <a:r>
+              <a:rPr lang="en-US" sz="2000" dirty="0"/>
+              <a:t>narrowing down from </a:t>
+            </a:r>
+            <a:r>
+              <a:rPr lang="en-US" sz="2000" i="1" dirty="0"/>
+              <a:t>general background information</a:t>
+            </a:r>
+            <a:r>
+              <a:rPr lang="en-US" sz="2000" dirty="0">
+                <a:sym typeface="Wingdings" pitchFamily="2" charset="2"/>
+              </a:rPr>
+              <a:t> </a:t>
+            </a:r>
+            <a:r>
+              <a:rPr lang="en-US" sz="2000" i="1" dirty="0">
+                <a:sym typeface="Wingdings" pitchFamily="2" charset="2"/>
+              </a:rPr>
+              <a:t>specific background research</a:t>
+            </a:r>
+            <a:r>
+              <a:rPr lang="en-US" sz="2000" dirty="0">
+                <a:sym typeface="Wingdings" pitchFamily="2" charset="2"/>
+              </a:rPr>
+              <a:t> </a:t>
+            </a:r>
+            <a:r>
+              <a:rPr lang="en-US" sz="2000" i="1" dirty="0">
+                <a:sym typeface="Wingdings" pitchFamily="2" charset="2"/>
+              </a:rPr>
+              <a:t>focused research scope (question, hypothesis, objectives etc.).</a:t>
+            </a:r>
+            <a:r>
+              <a:rPr lang="en-US" sz="2000" baseline="30000" dirty="0">
+                <a:sym typeface="Wingdings" pitchFamily="2" charset="2"/>
+              </a:rPr>
+              <a:t>2</a:t>
+            </a:r>
+            <a:endParaRPr lang="en-US" sz="2000" dirty="0"/>
+          </a:p>
+          <a:p>
+            <a:endParaRPr lang="en-US" dirty="0"/>
+          </a:p>
+        </p:txBody>
+      </p:sp>
+      <p:sp>
+        <p:nvSpPr>
+          <p:cNvPr id="10" name="Rectangle 9">
             <a:extLst>
               <a:ext uri="{FF2B5EF4-FFF2-40B4-BE49-F238E27FC236}">
-                <a16:creationId xmlns:a16="http://schemas.microsoft.com/office/drawing/2014/main" id="{C3926B3A-74D5-8EE2-4E29-69BC83D84FB0}"/>
-              </a:ext>
-            </a:extLst>
-          </p:cNvPr>
-          <p:cNvSpPr>
-            <a:spLocks noGrp="1"/>
-          </p:cNvSpPr>
-          <p:nvPr>
-            <p:ph type="title"/>
-          </p:nvPr>
-        </p:nvSpPr>
-        <p:spPr/>
-        <p:txBody>
-          <a:bodyPr/>
-          <a:lstStyle/>
-          <a:p>
-            <a:r>
-              <a:rPr lang="en-US" dirty="0"/>
-              <a:t>Main Analysis </a:t>
-            </a:r>
-          </a:p>
-        </p:txBody>
-      </p:sp>
-      <p:sp>
-        <p:nvSpPr>
-          <p:cNvPr id="3" name="Content Placeholder 2">
-            <a:extLst>
-              <a:ext uri="{FF2B5EF4-FFF2-40B4-BE49-F238E27FC236}">
-                <a16:creationId xmlns:a16="http://schemas.microsoft.com/office/drawing/2014/main" id="{74CA24F8-F23D-F580-A81A-5C76DC0AB8D6}"/>
-              </a:ext>
-            </a:extLst>
-          </p:cNvPr>
-          <p:cNvSpPr>
-            <a:spLocks noGrp="1"/>
-          </p:cNvSpPr>
-          <p:nvPr>
-            <p:ph idx="1"/>
-          </p:nvPr>
-        </p:nvSpPr>
-        <p:spPr/>
-        <p:txBody>
-          <a:bodyPr/>
-          <a:lstStyle/>
-          <a:p>
-            <a:r>
-              <a:rPr lang="en-US" dirty="0"/>
-              <a:t>COME Back </a:t>
-            </a:r>
-          </a:p>
-        </p:txBody>
-      </p:sp>
-    </p:spTree>
-    <p:extLst>
-      <p:ext uri="{BB962C8B-B14F-4D97-AF65-F5344CB8AC3E}">
-        <p14:creationId xmlns:p14="http://schemas.microsoft.com/office/powerpoint/2010/main" val="297363484"/>
-      </p:ext>
-    </p:extLst>
-  </p:cSld>
-  <p:clrMapOvr>
-    <a:masterClrMapping/>
-  </p:clrMapOvr>
-</p:sld>
-</file>
-
-<file path=ppt/slides/slide7.xml><?xml version="1.0" encoding="utf-8"?>
-<p:sld xmlns:a="http://schemas.openxmlformats.org/drawingml/2006/main" xmlns:r="http://schemas.openxmlformats.org/officeDocument/2006/relationships" xmlns:p="http://schemas.openxmlformats.org/presentationml/2006/main">
-  <p:cSld>
-    <p:spTree>
-      <p:nvGrpSpPr>
-        <p:cNvPr id="1" name="">
-          <a:extLst>
-            <a:ext uri="{FF2B5EF4-FFF2-40B4-BE49-F238E27FC236}">
-              <a16:creationId xmlns:a16="http://schemas.microsoft.com/office/drawing/2014/main" id="{1E7C3C6D-C096-1B1F-65B2-01A30E50C3EC}"/>
-            </a:ext>
-          </a:extLst>
-        </p:cNvPr>
-        <p:cNvGrpSpPr/>
-        <p:nvPr/>
-      </p:nvGrpSpPr>
-      <p:grpSpPr>
-        <a:xfrm>
-          <a:off x="0" y="0"/>
-          <a:ext cx="0" cy="0"/>
-          <a:chOff x="0" y="0"/>
-          <a:chExt cx="0" cy="0"/>
-        </a:xfrm>
-      </p:grpSpPr>
-      <p:sp>
-        <p:nvSpPr>
-          <p:cNvPr id="2" name="Title 1">
-            <a:extLst>
-              <a:ext uri="{FF2B5EF4-FFF2-40B4-BE49-F238E27FC236}">
-                <a16:creationId xmlns:a16="http://schemas.microsoft.com/office/drawing/2014/main" id="{A1DF606C-35E1-8BE6-C1DF-2C461411CEC0}"/>
-              </a:ext>
-            </a:extLst>
-          </p:cNvPr>
-          <p:cNvSpPr>
-            <a:spLocks noGrp="1"/>
-          </p:cNvSpPr>
-          <p:nvPr>
-            <p:ph type="title"/>
-          </p:nvPr>
-        </p:nvSpPr>
-        <p:spPr/>
-        <p:txBody>
-          <a:bodyPr/>
-          <a:lstStyle/>
-          <a:p>
-            <a:r>
-              <a:rPr lang="en-US" dirty="0"/>
-              <a:t>Secondary  Analysis </a:t>
-            </a:r>
-          </a:p>
-        </p:txBody>
-      </p:sp>
-      <p:sp>
-        <p:nvSpPr>
-          <p:cNvPr id="3" name="Content Placeholder 2">
-            <a:extLst>
-              <a:ext uri="{FF2B5EF4-FFF2-40B4-BE49-F238E27FC236}">
-                <a16:creationId xmlns:a16="http://schemas.microsoft.com/office/drawing/2014/main" id="{2044B23C-C143-4C4E-A061-0C35373395B9}"/>
-              </a:ext>
-            </a:extLst>
-          </p:cNvPr>
-          <p:cNvSpPr>
-            <a:spLocks noGrp="1"/>
-          </p:cNvSpPr>
-          <p:nvPr>
-            <p:ph idx="1"/>
-          </p:nvPr>
-        </p:nvSpPr>
-        <p:spPr/>
-        <p:txBody>
-          <a:bodyPr/>
-          <a:lstStyle/>
-          <a:p>
-            <a:r>
-              <a:rPr lang="en-US" dirty="0"/>
-              <a:t>Secondary analysis:  </a:t>
-            </a:r>
-          </a:p>
-          <a:p>
-            <a:pPr lvl="1"/>
-            <a:r>
-              <a:rPr lang="en-US" dirty="0"/>
-              <a:t>Also sometimes referred to as sensitivity analysis.  </a:t>
-            </a:r>
-          </a:p>
-          <a:p>
-            <a:pPr lvl="1"/>
-            <a:r>
-              <a:rPr lang="en-US" dirty="0"/>
-              <a:t>Focuses on secondary exposure, secondary outcomes or higher order models (heterogeneity, trends etc.) </a:t>
-            </a:r>
-          </a:p>
-          <a:p>
-            <a:pPr lvl="1"/>
-            <a:endParaRPr lang="en-US" dirty="0"/>
-          </a:p>
-          <a:p>
-            <a:pPr lvl="1"/>
-            <a:endParaRPr lang="en-US" dirty="0"/>
-          </a:p>
-        </p:txBody>
-      </p:sp>
-    </p:spTree>
-    <p:extLst>
-      <p:ext uri="{BB962C8B-B14F-4D97-AF65-F5344CB8AC3E}">
-        <p14:creationId xmlns:p14="http://schemas.microsoft.com/office/powerpoint/2010/main" val="297093291"/>
-      </p:ext>
-    </p:extLst>
-  </p:cSld>
-  <p:clrMapOvr>
-    <a:masterClrMapping/>
-  </p:clrMapOvr>
-</p:sld>
-</file>
-
-<file path=ppt/slides/slide8.xml><?xml version="1.0" encoding="utf-8"?>
-<p:sld xmlns:a="http://schemas.openxmlformats.org/drawingml/2006/main" xmlns:r="http://schemas.openxmlformats.org/officeDocument/2006/relationships" xmlns:p="http://schemas.openxmlformats.org/presentationml/2006/main">
-  <p:cSld>
-    <p:spTree>
-      <p:nvGrpSpPr>
-        <p:cNvPr id="1" name="">
-          <a:extLst>
-            <a:ext uri="{FF2B5EF4-FFF2-40B4-BE49-F238E27FC236}">
-              <a16:creationId xmlns:a16="http://schemas.microsoft.com/office/drawing/2014/main" id="{63E0A2EF-8F7F-0649-99A5-A714ED45482F}"/>
-            </a:ext>
-          </a:extLst>
-        </p:cNvPr>
-        <p:cNvGrpSpPr/>
-        <p:nvPr/>
-      </p:nvGrpSpPr>
-      <p:grpSpPr>
-        <a:xfrm>
-          <a:off x="0" y="0"/>
-          <a:ext cx="0" cy="0"/>
-          <a:chOff x="0" y="0"/>
-          <a:chExt cx="0" cy="0"/>
-        </a:xfrm>
-      </p:grpSpPr>
-      <p:sp>
-        <p:nvSpPr>
-          <p:cNvPr id="2" name="Title 1">
-            <a:extLst>
-              <a:ext uri="{FF2B5EF4-FFF2-40B4-BE49-F238E27FC236}">
-                <a16:creationId xmlns:a16="http://schemas.microsoft.com/office/drawing/2014/main" id="{B7964B4E-F467-9523-3FD3-0C6E74D6ABE5}"/>
-              </a:ext>
-            </a:extLst>
-          </p:cNvPr>
-          <p:cNvSpPr>
-            <a:spLocks noGrp="1"/>
-          </p:cNvSpPr>
-          <p:nvPr>
-            <p:ph type="title"/>
-          </p:nvPr>
-        </p:nvSpPr>
-        <p:spPr/>
-        <p:txBody>
-          <a:bodyPr/>
-          <a:lstStyle/>
-          <a:p>
-            <a:r>
-              <a:rPr lang="en-US" dirty="0"/>
-              <a:t>Effect Measure Modification </a:t>
-            </a:r>
-          </a:p>
-        </p:txBody>
-      </p:sp>
-      <p:sp>
-        <p:nvSpPr>
-          <p:cNvPr id="3" name="Content Placeholder 2">
-            <a:extLst>
-              <a:ext uri="{FF2B5EF4-FFF2-40B4-BE49-F238E27FC236}">
-                <a16:creationId xmlns:a16="http://schemas.microsoft.com/office/drawing/2014/main" id="{65B5654B-1DBF-29D6-486C-58F3C3821593}"/>
-              </a:ext>
-            </a:extLst>
-          </p:cNvPr>
-          <p:cNvSpPr>
-            <a:spLocks noGrp="1"/>
-          </p:cNvSpPr>
-          <p:nvPr>
-            <p:ph idx="1"/>
-          </p:nvPr>
-        </p:nvSpPr>
-        <p:spPr/>
-        <p:txBody>
-          <a:bodyPr/>
-          <a:lstStyle/>
-          <a:p>
-            <a:pPr lvl="1"/>
-            <a:r>
-              <a:rPr lang="en-US" dirty="0"/>
-              <a:t>In main analysis of the primary association (A) and primary outcome (Y) we are interested in understanding the way that the distribution of the outcome (Y) changes given the presence of the association (A) </a:t>
-            </a:r>
-          </a:p>
-          <a:p>
-            <a:pPr lvl="1"/>
-            <a:r>
-              <a:rPr lang="en-US" dirty="0"/>
-              <a:t>In other words if we are looking at the average level of phenols at a given food security level we would say: </a:t>
-            </a:r>
-          </a:p>
-          <a:p>
-            <a:pPr lvl="8"/>
-            <a:r>
-              <a:rPr lang="en-US" dirty="0"/>
-              <a:t>E[Y=BPA|A=Food Security]</a:t>
-            </a:r>
-          </a:p>
-          <a:p>
-            <a:pPr lvl="1"/>
-            <a:r>
-              <a:rPr lang="en-US" dirty="0"/>
-              <a:t>If we adjust for additional variables (</a:t>
-            </a:r>
-            <a:r>
-              <a:rPr lang="en-US" dirty="0" err="1"/>
-              <a:t>i.e</a:t>
-            </a:r>
-            <a:r>
-              <a:rPr lang="en-US" dirty="0"/>
-              <a:t> confounders) we would say: </a:t>
-            </a:r>
-          </a:p>
-          <a:p>
-            <a:pPr lvl="8"/>
-            <a:r>
-              <a:rPr lang="en-US" dirty="0"/>
-              <a:t>E[Y=BPA|A=Food Security, L=Confounders]</a:t>
-            </a:r>
-          </a:p>
-          <a:p>
-            <a:pPr lvl="2"/>
-            <a:endParaRPr lang="en-US" dirty="0"/>
-          </a:p>
-          <a:p>
-            <a:pPr lvl="1"/>
-            <a:endParaRPr lang="en-US" dirty="0"/>
-          </a:p>
-        </p:txBody>
-      </p:sp>
-    </p:spTree>
-    <p:extLst>
-      <p:ext uri="{BB962C8B-B14F-4D97-AF65-F5344CB8AC3E}">
-        <p14:creationId xmlns:p14="http://schemas.microsoft.com/office/powerpoint/2010/main" val="3132491619"/>
-      </p:ext>
-    </p:extLst>
-  </p:cSld>
-  <p:clrMapOvr>
-    <a:masterClrMapping/>
-  </p:clrMapOvr>
-</p:sld>
-</file>
-
-<file path=ppt/slides/slide9.xml><?xml version="1.0" encoding="utf-8"?>
-<p:sld xmlns:a="http://schemas.openxmlformats.org/drawingml/2006/main" xmlns:r="http://schemas.openxmlformats.org/officeDocument/2006/relationships" xmlns:p="http://schemas.openxmlformats.org/presentationml/2006/main">
-  <p:cSld>
-    <p:bg>
-      <p:bgPr>
-        <a:solidFill>
-          <a:schemeClr val="bg1">
-            <a:lumMod val="95000"/>
-          </a:schemeClr>
-        </a:solidFill>
-        <a:effectLst/>
-      </p:bgPr>
-    </p:bg>
-    <p:spTree>
-      <p:nvGrpSpPr>
-        <p:cNvPr id="1" name="">
-          <a:extLst>
-            <a:ext uri="{FF2B5EF4-FFF2-40B4-BE49-F238E27FC236}">
-              <a16:creationId xmlns:a16="http://schemas.microsoft.com/office/drawing/2014/main" id="{16287603-B7F0-638E-1925-9C3B71282184}"/>
-            </a:ext>
-          </a:extLst>
-        </p:cNvPr>
-        <p:cNvGrpSpPr/>
-        <p:nvPr/>
-      </p:nvGrpSpPr>
-      <p:grpSpPr>
-        <a:xfrm>
-          <a:off x="0" y="0"/>
-          <a:ext cx="0" cy="0"/>
-          <a:chOff x="0" y="0"/>
-          <a:chExt cx="0" cy="0"/>
-        </a:xfrm>
-      </p:grpSpPr>
-      <p:sp useBgFill="1">
-        <p:nvSpPr>
-          <p:cNvPr id="9" name="Rectangle 8">
-            <a:extLst>
-              <a:ext uri="{FF2B5EF4-FFF2-40B4-BE49-F238E27FC236}">
-                <a16:creationId xmlns:a16="http://schemas.microsoft.com/office/drawing/2014/main" id="{1660E788-AFA9-4A1B-9991-6AA74632A15B}"/>
+                <a16:creationId xmlns:a16="http://schemas.microsoft.com/office/drawing/2014/main" id="{879398A9-0D0D-4901-BDDF-B3D93CECA7B9}"/>
               </a:ext>
               <a:ext uri="{C183D7F6-B498-43B3-948B-1728B52AA6E4}">
                 <adec:decorative xmlns:adec="http://schemas.microsoft.com/office/drawing/2017/decorative" val="1"/>
@@ -5171,12 +5121,79 @@
         </p:nvSpPr>
         <p:spPr>
           <a:xfrm>
-            <a:off x="0" y="0"/>
-            <a:ext cx="12191999" cy="6858000"/>
+            <a:off x="7386706" y="964692"/>
+            <a:ext cx="3986784" cy="4936558"/>
           </a:xfrm>
           <a:prstGeom prst="rect">
             <a:avLst/>
           </a:prstGeom>
+          <a:noFill/>
+          <a:ln w="31750" cap="sq">
+            <a:solidFill>
+              <a:srgbClr val="FFFFFF"/>
+            </a:solidFill>
+            <a:miter lim="800000"/>
+          </a:ln>
+        </p:spPr>
+        <p:style>
+          <a:lnRef idx="2">
+            <a:schemeClr val="accent1">
+              <a:shade val="50000"/>
+            </a:schemeClr>
+          </a:lnRef>
+          <a:fillRef idx="1">
+            <a:schemeClr val="accent1"/>
+          </a:fillRef>
+          <a:effectRef idx="0">
+            <a:schemeClr val="accent1"/>
+          </a:effectRef>
+          <a:fontRef idx="minor">
+            <a:schemeClr val="lt1"/>
+          </a:fontRef>
+        </p:style>
+        <p:txBody>
+          <a:bodyPr rtlCol="0" anchor="ctr"/>
+          <a:lstStyle/>
+          <a:p>
+            <a:pPr algn="ctr"/>
+            <a:endParaRPr lang="en-US" dirty="0"/>
+          </a:p>
+        </p:txBody>
+      </p:sp>
+      <p:sp>
+        <p:nvSpPr>
+          <p:cNvPr id="12" name="Rectangle 11">
+            <a:extLst>
+              <a:ext uri="{FF2B5EF4-FFF2-40B4-BE49-F238E27FC236}">
+                <a16:creationId xmlns:a16="http://schemas.microsoft.com/office/drawing/2014/main" id="{011FEC3B-E514-4E21-B2CB-7903A73569E2}"/>
+              </a:ext>
+              <a:ext uri="{C183D7F6-B498-43B3-948B-1728B52AA6E4}">
+                <adec:decorative xmlns:adec="http://schemas.microsoft.com/office/drawing/2017/decorative" val="1"/>
+              </a:ext>
+            </a:extLst>
+          </p:cNvPr>
+          <p:cNvSpPr>
+            <a:spLocks noGrp="1" noRot="1" noChangeAspect="1" noMove="1" noResize="1" noEditPoints="1" noAdjustHandles="1" noChangeArrowheads="1" noChangeShapeType="1" noTextEdit="1"/>
+          </p:cNvSpPr>
+          <p:nvPr>
+            <p:extLst>
+              <p:ext uri="{386F3935-93C4-4BCD-93E2-E3B085C9AB24}">
+                <p16:designElem xmlns:p16="http://schemas.microsoft.com/office/powerpoint/2015/main" val="1"/>
+              </p:ext>
+            </p:extLst>
+          </p:nvPr>
+        </p:nvSpPr>
+        <p:spPr>
+          <a:xfrm>
+            <a:off x="7551298" y="1128683"/>
+            <a:ext cx="3657600" cy="4608576"/>
+          </a:xfrm>
+          <a:prstGeom prst="rect">
+            <a:avLst/>
+          </a:prstGeom>
+          <a:solidFill>
+            <a:srgbClr val="FFFFFF"/>
+          </a:solidFill>
           <a:ln>
             <a:noFill/>
           </a:ln>
@@ -5206,185 +5223,12 @@
           </a:p>
         </p:txBody>
       </p:sp>
-      <p:sp>
-        <p:nvSpPr>
-          <p:cNvPr id="11" name="Rectangle 10">
+      <p:pic>
+        <p:nvPicPr>
+          <p:cNvPr id="5" name="Picture 4">
             <a:extLst>
               <a:ext uri="{FF2B5EF4-FFF2-40B4-BE49-F238E27FC236}">
-                <a16:creationId xmlns:a16="http://schemas.microsoft.com/office/drawing/2014/main" id="{867D4867-5BA7-4462-B2F6-A23F4A622AA7}"/>
-              </a:ext>
-              <a:ext uri="{C183D7F6-B498-43B3-948B-1728B52AA6E4}">
-                <adec:decorative xmlns:adec="http://schemas.microsoft.com/office/drawing/2017/decorative" val="1"/>
-              </a:ext>
-            </a:extLst>
-          </p:cNvPr>
-          <p:cNvSpPr>
-            <a:spLocks noGrp="1" noRot="1" noChangeAspect="1" noMove="1" noResize="1" noEditPoints="1" noAdjustHandles="1" noChangeArrowheads="1" noChangeShapeType="1" noTextEdit="1"/>
-          </p:cNvSpPr>
-          <p:nvPr>
-            <p:extLst>
-              <p:ext uri="{386F3935-93C4-4BCD-93E2-E3B085C9AB24}">
-                <p16:designElem xmlns:p16="http://schemas.microsoft.com/office/powerpoint/2015/main" val="1"/>
-              </p:ext>
-            </p:extLst>
-          </p:nvPr>
-        </p:nvSpPr>
-        <p:spPr>
-          <a:xfrm>
-            <a:off x="0" y="0"/>
-            <a:ext cx="4654296" cy="6858000"/>
-          </a:xfrm>
-          <a:prstGeom prst="rect">
-            <a:avLst/>
-          </a:prstGeom>
-          <a:solidFill>
-            <a:schemeClr val="tx2"/>
-          </a:solidFill>
-          <a:ln>
-            <a:noFill/>
-          </a:ln>
-        </p:spPr>
-        <p:style>
-          <a:lnRef idx="0">
-            <a:scrgbClr r="0" g="0" b="0"/>
-          </a:lnRef>
-          <a:fillRef idx="0">
-            <a:scrgbClr r="0" g="0" b="0"/>
-          </a:fillRef>
-          <a:effectRef idx="0">
-            <a:scrgbClr r="0" g="0" b="0"/>
-          </a:effectRef>
-          <a:fontRef idx="minor">
-            <a:schemeClr val="lt1"/>
-          </a:fontRef>
-        </p:style>
-        <p:txBody>
-          <a:bodyPr rtlCol="0" anchor="ctr"/>
-          <a:lstStyle/>
-          <a:p>
-            <a:pPr algn="ctr"/>
-            <a:endParaRPr lang="en-US"/>
-          </a:p>
-        </p:txBody>
-      </p:sp>
-      <p:sp>
-        <p:nvSpPr>
-          <p:cNvPr id="2" name="Title 1">
-            <a:extLst>
-              <a:ext uri="{FF2B5EF4-FFF2-40B4-BE49-F238E27FC236}">
-                <a16:creationId xmlns:a16="http://schemas.microsoft.com/office/drawing/2014/main" id="{05AD2B83-6235-A78C-6AA8-54F128846567}"/>
-              </a:ext>
-            </a:extLst>
-          </p:cNvPr>
-          <p:cNvSpPr>
-            <a:spLocks noGrp="1"/>
-          </p:cNvSpPr>
-          <p:nvPr>
-            <p:ph type="title"/>
-          </p:nvPr>
-        </p:nvSpPr>
-        <p:spPr>
-          <a:xfrm>
-            <a:off x="643467" y="643467"/>
-            <a:ext cx="3363974" cy="1728044"/>
-          </a:xfrm>
-          <a:noFill/>
-          <a:ln>
-            <a:solidFill>
-              <a:schemeClr val="bg1"/>
-            </a:solidFill>
-          </a:ln>
-        </p:spPr>
-        <p:txBody>
-          <a:bodyPr wrap="square">
-            <a:normAutofit/>
-          </a:bodyPr>
-          <a:lstStyle/>
-          <a:p>
-            <a:r>
-              <a:rPr lang="en-US">
-                <a:solidFill>
-                  <a:schemeClr val="bg1"/>
-                </a:solidFill>
-              </a:rPr>
-              <a:t>Effect Measure Modification </a:t>
-            </a:r>
-          </a:p>
-        </p:txBody>
-      </p:sp>
-      <p:sp>
-        <p:nvSpPr>
-          <p:cNvPr id="3" name="Content Placeholder 2">
-            <a:extLst>
-              <a:ext uri="{FF2B5EF4-FFF2-40B4-BE49-F238E27FC236}">
-                <a16:creationId xmlns:a16="http://schemas.microsoft.com/office/drawing/2014/main" id="{2F0223E3-BD9C-1A8B-8EF7-5B2F2C479974}"/>
-              </a:ext>
-            </a:extLst>
-          </p:cNvPr>
-          <p:cNvSpPr>
-            <a:spLocks noGrp="1"/>
-          </p:cNvSpPr>
-          <p:nvPr>
-            <p:ph idx="1"/>
-          </p:nvPr>
-        </p:nvSpPr>
-        <p:spPr>
-          <a:xfrm>
-            <a:off x="643467" y="2638044"/>
-            <a:ext cx="3683205" cy="3415622"/>
-          </a:xfrm>
-        </p:spPr>
-        <p:txBody>
-          <a:bodyPr>
-            <a:normAutofit/>
-          </a:bodyPr>
-          <a:lstStyle/>
-          <a:p>
-            <a:pPr lvl="1"/>
-            <a:r>
-              <a:rPr lang="en-US" dirty="0">
-                <a:solidFill>
-                  <a:schemeClr val="bg1"/>
-                </a:solidFill>
-              </a:rPr>
-              <a:t>As we discussed we would interpret this as the expected value of phenols, given a changing level of food security is a given number,  x ng/mL</a:t>
-            </a:r>
-          </a:p>
-          <a:p>
-            <a:pPr lvl="1"/>
-            <a:r>
-              <a:rPr lang="en-US" dirty="0">
-                <a:solidFill>
-                  <a:schemeClr val="bg1"/>
-                </a:solidFill>
-              </a:rPr>
-              <a:t>In the case of a categorical variable, we would compare each respective estimated level to the reference value </a:t>
-            </a:r>
-          </a:p>
-          <a:p>
-            <a:pPr lvl="2"/>
-            <a:endParaRPr lang="en-US" dirty="0">
-              <a:solidFill>
-                <a:schemeClr val="bg1"/>
-              </a:solidFill>
-            </a:endParaRPr>
-          </a:p>
-          <a:p>
-            <a:pPr lvl="1"/>
-            <a:endParaRPr lang="en-US" dirty="0">
-              <a:solidFill>
-                <a:schemeClr val="bg1"/>
-              </a:solidFill>
-            </a:endParaRPr>
-          </a:p>
-        </p:txBody>
-      </p:sp>
-      <p:pic>
-        <p:nvPicPr>
-          <p:cNvPr id="4" name="Picture 3" descr="A screenshot of a table&#10;&#10;AI-generated content may be incorrect.">
-            <a:extLst>
-              <a:ext uri="{FF2B5EF4-FFF2-40B4-BE49-F238E27FC236}">
-                <a16:creationId xmlns:a16="http://schemas.microsoft.com/office/drawing/2014/main" id="{33B5FC49-7D71-7C4F-AFC8-A7FBE2AF7760}"/>
+                <a16:creationId xmlns:a16="http://schemas.microsoft.com/office/drawing/2014/main" id="{E3DDA8D3-FE4E-1D82-3989-49CE2FF3F272}"/>
               </a:ext>
             </a:extLst>
           </p:cNvPr>
@@ -5401,70 +5245,644 @@
         </p:blipFill>
         <p:spPr>
           <a:xfrm>
-            <a:off x="6286119" y="643467"/>
-            <a:ext cx="4274056" cy="5410199"/>
+            <a:off x="7715890" y="1993431"/>
+            <a:ext cx="3328416" cy="2879079"/>
           </a:xfrm>
           <a:prstGeom prst="rect">
             <a:avLst/>
           </a:prstGeom>
         </p:spPr>
       </p:pic>
-      <p:sp>
-        <p:nvSpPr>
-          <p:cNvPr id="8" name="Rectangle 7">
+    </p:spTree>
+    <p:extLst>
+      <p:ext uri="{BB962C8B-B14F-4D97-AF65-F5344CB8AC3E}">
+        <p14:creationId xmlns:p14="http://schemas.microsoft.com/office/powerpoint/2010/main" val="3783374745"/>
+      </p:ext>
+    </p:extLst>
+  </p:cSld>
+  <p:clrMapOvr>
+    <a:masterClrMapping/>
+  </p:clrMapOvr>
+</p:sld>
+</file>
+
+<file path=ppt/slides/slide6.xml><?xml version="1.0" encoding="utf-8"?>
+<p:sld xmlns:a="http://schemas.openxmlformats.org/drawingml/2006/main" xmlns:r="http://schemas.openxmlformats.org/officeDocument/2006/relationships" xmlns:p="http://schemas.openxmlformats.org/presentationml/2006/main">
+  <p:cSld>
+    <p:spTree>
+      <p:nvGrpSpPr>
+        <p:cNvPr id="1" name="">
+          <a:extLst>
+            <a:ext uri="{FF2B5EF4-FFF2-40B4-BE49-F238E27FC236}">
+              <a16:creationId xmlns:a16="http://schemas.microsoft.com/office/drawing/2014/main" id="{8D28147C-380A-6342-6C69-3A0A49822CDA}"/>
+            </a:ext>
+          </a:extLst>
+        </p:cNvPr>
+        <p:cNvGrpSpPr/>
+        <p:nvPr/>
+      </p:nvGrpSpPr>
+      <p:grpSpPr>
+        <a:xfrm>
+          <a:off x="0" y="0"/>
+          <a:ext cx="0" cy="0"/>
+          <a:chOff x="0" y="0"/>
+          <a:chExt cx="0" cy="0"/>
+        </a:xfrm>
+      </p:grpSpPr>
+      <p:sp>
+        <p:nvSpPr>
+          <p:cNvPr id="2" name="Title 1">
             <a:extLst>
               <a:ext uri="{FF2B5EF4-FFF2-40B4-BE49-F238E27FC236}">
-                <a16:creationId xmlns:a16="http://schemas.microsoft.com/office/drawing/2014/main" id="{CD72FE55-F14A-C043-C7D2-EEFB8C7D08A7}"/>
+                <a16:creationId xmlns:a16="http://schemas.microsoft.com/office/drawing/2014/main" id="{FE76A843-B710-2253-5690-22DB36B5E703}"/>
               </a:ext>
             </a:extLst>
           </p:cNvPr>
-          <p:cNvSpPr/>
-          <p:nvPr/>
-        </p:nvSpPr>
-        <p:spPr>
-          <a:xfrm>
-            <a:off x="6286119" y="1081668"/>
-            <a:ext cx="4419052" cy="713678"/>
-          </a:xfrm>
-          <a:prstGeom prst="rect">
-            <a:avLst/>
-          </a:prstGeom>
-          <a:noFill/>
-          <a:ln w="57150">
-            <a:solidFill>
-              <a:srgbClr val="C00000"/>
-            </a:solidFill>
-          </a:ln>
-        </p:spPr>
-        <p:style>
-          <a:lnRef idx="2">
-            <a:schemeClr val="accent1">
-              <a:shade val="15000"/>
-            </a:schemeClr>
-          </a:lnRef>
-          <a:fillRef idx="1">
-            <a:schemeClr val="accent1"/>
-          </a:fillRef>
-          <a:effectRef idx="0">
-            <a:schemeClr val="accent1"/>
-          </a:effectRef>
-          <a:fontRef idx="minor">
-            <a:schemeClr val="lt1"/>
-          </a:fontRef>
-        </p:style>
-        <p:txBody>
-          <a:bodyPr rtlCol="0" anchor="ctr"/>
-          <a:lstStyle/>
-          <a:p>
-            <a:pPr algn="ctr"/>
-            <a:endParaRPr lang="en-US"/>
+          <p:cNvSpPr>
+            <a:spLocks noGrp="1"/>
+          </p:cNvSpPr>
+          <p:nvPr>
+            <p:ph type="title"/>
+          </p:nvPr>
+        </p:nvSpPr>
+        <p:spPr/>
+        <p:txBody>
+          <a:bodyPr/>
+          <a:lstStyle/>
+          <a:p>
+            <a:r>
+              <a:rPr lang="en-US" dirty="0"/>
+              <a:t>Introduce research topic</a:t>
+            </a:r>
+          </a:p>
+        </p:txBody>
+      </p:sp>
+      <p:sp>
+        <p:nvSpPr>
+          <p:cNvPr id="3" name="Content Placeholder 2">
+            <a:extLst>
+              <a:ext uri="{FF2B5EF4-FFF2-40B4-BE49-F238E27FC236}">
+                <a16:creationId xmlns:a16="http://schemas.microsoft.com/office/drawing/2014/main" id="{EE5ADF0E-014C-3E25-DA78-D39C100BD78C}"/>
+              </a:ext>
+            </a:extLst>
+          </p:cNvPr>
+          <p:cNvSpPr>
+            <a:spLocks noGrp="1"/>
+          </p:cNvSpPr>
+          <p:nvPr>
+            <p:ph idx="1"/>
+          </p:nvPr>
+        </p:nvSpPr>
+        <p:spPr/>
+        <p:txBody>
+          <a:bodyPr/>
+          <a:lstStyle/>
+          <a:p>
+            <a:r>
+              <a:rPr lang="en-US" b="1" dirty="0">
+                <a:solidFill>
+                  <a:srgbClr val="002060"/>
+                </a:solidFill>
+              </a:rPr>
+              <a:t>Start with: </a:t>
+            </a:r>
+            <a:r>
+              <a:rPr lang="en-US" dirty="0"/>
+              <a:t>establishing </a:t>
+            </a:r>
+            <a:r>
+              <a:rPr lang="en-US" b="1" dirty="0"/>
+              <a:t>background context for audience (</a:t>
+            </a:r>
+            <a:r>
+              <a:rPr lang="en-US" b="1" dirty="0" err="1"/>
+              <a:t>e.g</a:t>
+            </a:r>
+            <a:r>
+              <a:rPr lang="en-US" b="1" dirty="0"/>
+              <a:t> readers)</a:t>
+            </a:r>
+            <a:r>
+              <a:rPr lang="en-US" b="1" baseline="30000" dirty="0"/>
+              <a:t>3</a:t>
+            </a:r>
+            <a:endParaRPr lang="en-US" baseline="30000" dirty="0"/>
+          </a:p>
+          <a:p>
+            <a:r>
+              <a:rPr lang="en-US" dirty="0"/>
+              <a:t>Seek to establish or elaborate on </a:t>
+            </a:r>
+            <a:r>
+              <a:rPr lang="en-US" i="1" dirty="0"/>
+              <a:t>shared understanding of research topic </a:t>
+            </a:r>
+            <a:r>
+              <a:rPr lang="en-US" dirty="0"/>
+              <a:t>between </a:t>
+            </a:r>
+            <a:r>
+              <a:rPr lang="en-US" b="1" dirty="0"/>
+              <a:t>author</a:t>
+            </a:r>
+            <a:r>
+              <a:rPr lang="en-US" dirty="0"/>
+              <a:t> and </a:t>
+            </a:r>
+            <a:r>
+              <a:rPr lang="en-US" b="1" dirty="0"/>
+              <a:t>audience</a:t>
+            </a:r>
+            <a:r>
+              <a:rPr lang="en-US" dirty="0"/>
+              <a:t> (e.g. readers incl. colleagues within same discipline)</a:t>
+            </a:r>
+          </a:p>
+          <a:p>
+            <a:r>
+              <a:rPr lang="en-US" dirty="0"/>
+              <a:t>Vary by discipline but generally leverages </a:t>
+            </a:r>
+            <a:r>
+              <a:rPr lang="en-US" i="1" dirty="0"/>
+              <a:t>common knowledge </a:t>
+            </a:r>
+            <a:r>
+              <a:rPr lang="en-US" dirty="0"/>
+              <a:t>on research idea introducing it as an “ongoing academic conversation on the topic”.</a:t>
+            </a:r>
           </a:p>
         </p:txBody>
       </p:sp>
     </p:spTree>
     <p:extLst>
       <p:ext uri="{BB962C8B-B14F-4D97-AF65-F5344CB8AC3E}">
-        <p14:creationId xmlns:p14="http://schemas.microsoft.com/office/powerpoint/2010/main" val="2370111651"/>
+        <p14:creationId xmlns:p14="http://schemas.microsoft.com/office/powerpoint/2010/main" val="1347624096"/>
+      </p:ext>
+    </p:extLst>
+  </p:cSld>
+  <p:clrMapOvr>
+    <a:masterClrMapping/>
+  </p:clrMapOvr>
+</p:sld>
+</file>
+
+<file path=ppt/slides/slide7.xml><?xml version="1.0" encoding="utf-8"?>
+<p:sld xmlns:a="http://schemas.openxmlformats.org/drawingml/2006/main" xmlns:r="http://schemas.openxmlformats.org/officeDocument/2006/relationships" xmlns:p="http://schemas.openxmlformats.org/presentationml/2006/main">
+  <p:cSld>
+    <p:spTree>
+      <p:nvGrpSpPr>
+        <p:cNvPr id="1" name=""/>
+        <p:cNvGrpSpPr/>
+        <p:nvPr/>
+      </p:nvGrpSpPr>
+      <p:grpSpPr>
+        <a:xfrm>
+          <a:off x="0" y="0"/>
+          <a:ext cx="0" cy="0"/>
+          <a:chOff x="0" y="0"/>
+          <a:chExt cx="0" cy="0"/>
+        </a:xfrm>
+      </p:grpSpPr>
+      <p:sp>
+        <p:nvSpPr>
+          <p:cNvPr id="2" name="Title 1">
+            <a:extLst>
+              <a:ext uri="{FF2B5EF4-FFF2-40B4-BE49-F238E27FC236}">
+                <a16:creationId xmlns:a16="http://schemas.microsoft.com/office/drawing/2014/main" id="{55F4D700-2380-B451-486B-B5EF644B0D47}"/>
+              </a:ext>
+            </a:extLst>
+          </p:cNvPr>
+          <p:cNvSpPr>
+            <a:spLocks noGrp="1"/>
+          </p:cNvSpPr>
+          <p:nvPr>
+            <p:ph type="title"/>
+          </p:nvPr>
+        </p:nvSpPr>
+        <p:spPr/>
+        <p:txBody>
+          <a:bodyPr/>
+          <a:lstStyle/>
+          <a:p>
+            <a:r>
+              <a:rPr lang="en-US" dirty="0"/>
+              <a:t>Introduce research topic</a:t>
+            </a:r>
+          </a:p>
+        </p:txBody>
+      </p:sp>
+      <p:sp>
+        <p:nvSpPr>
+          <p:cNvPr id="3" name="Content Placeholder 2">
+            <a:extLst>
+              <a:ext uri="{FF2B5EF4-FFF2-40B4-BE49-F238E27FC236}">
+                <a16:creationId xmlns:a16="http://schemas.microsoft.com/office/drawing/2014/main" id="{0EFF4239-2957-1E32-FAB4-93CC29239CA2}"/>
+              </a:ext>
+            </a:extLst>
+          </p:cNvPr>
+          <p:cNvSpPr>
+            <a:spLocks noGrp="1"/>
+          </p:cNvSpPr>
+          <p:nvPr>
+            <p:ph idx="1"/>
+          </p:nvPr>
+        </p:nvSpPr>
+        <p:spPr/>
+        <p:txBody>
+          <a:bodyPr/>
+          <a:lstStyle/>
+          <a:p>
+            <a:r>
+              <a:rPr lang="en-US" b="1" dirty="0">
+                <a:solidFill>
+                  <a:srgbClr val="002060"/>
+                </a:solidFill>
+              </a:rPr>
+              <a:t>Transition into: </a:t>
+            </a:r>
+            <a:r>
+              <a:rPr lang="en-US" dirty="0"/>
+              <a:t>description of significance of research idea</a:t>
+            </a:r>
+            <a:r>
+              <a:rPr lang="en-US" b="1" baseline="30000" dirty="0"/>
+              <a:t>3</a:t>
+            </a:r>
+            <a:endParaRPr lang="en-US" baseline="30000" dirty="0"/>
+          </a:p>
+          <a:p>
+            <a:r>
+              <a:rPr lang="en-US" b="1" dirty="0"/>
+              <a:t>Disrupt</a:t>
+            </a:r>
+            <a:r>
+              <a:rPr lang="en-US" dirty="0"/>
+              <a:t> establish claimed and stable context with </a:t>
+            </a:r>
+            <a:r>
+              <a:rPr lang="en-US" b="1" dirty="0"/>
+              <a:t>destabilizing condition</a:t>
+            </a:r>
+            <a:r>
+              <a:rPr lang="en-US" dirty="0"/>
+              <a:t>.</a:t>
+            </a:r>
+            <a:r>
+              <a:rPr lang="en-US" baseline="30000" dirty="0"/>
+              <a:t>3</a:t>
+            </a:r>
+            <a:r>
+              <a:rPr lang="en-US" dirty="0"/>
+              <a:t> </a:t>
+            </a:r>
+          </a:p>
+          <a:p>
+            <a:pPr lvl="1"/>
+            <a:r>
+              <a:rPr lang="en-US" dirty="0"/>
+              <a:t>Common ground + disrupting problem</a:t>
+            </a:r>
+            <a:r>
+              <a:rPr lang="en-US" baseline="30000" dirty="0"/>
+              <a:t>3</a:t>
+            </a:r>
+            <a:r>
+              <a:rPr lang="en-US" dirty="0"/>
+              <a:t> </a:t>
+            </a:r>
+          </a:p>
+          <a:p>
+            <a:pPr lvl="1"/>
+            <a:r>
+              <a:rPr lang="en-US" dirty="0"/>
+              <a:t>Established knowledge + existing misunderstanding or incomplete knowledge area</a:t>
+            </a:r>
+            <a:r>
+              <a:rPr lang="en-US" baseline="30000" dirty="0"/>
+              <a:t>3</a:t>
+            </a:r>
+          </a:p>
+          <a:p>
+            <a:r>
+              <a:rPr lang="en-US" dirty="0"/>
+              <a:t>A few additional supporting details may be sandwiched in between introduction of relevant topic and significance of topic as it relates to your study (i.e. area of incomplete knowledge) </a:t>
+            </a:r>
+          </a:p>
+        </p:txBody>
+      </p:sp>
+    </p:spTree>
+    <p:extLst>
+      <p:ext uri="{BB962C8B-B14F-4D97-AF65-F5344CB8AC3E}">
+        <p14:creationId xmlns:p14="http://schemas.microsoft.com/office/powerpoint/2010/main" val="580720199"/>
+      </p:ext>
+    </p:extLst>
+  </p:cSld>
+  <p:clrMapOvr>
+    <a:masterClrMapping/>
+  </p:clrMapOvr>
+</p:sld>
+</file>
+
+<file path=ppt/slides/slide8.xml><?xml version="1.0" encoding="utf-8"?>
+<p:sld xmlns:a="http://schemas.openxmlformats.org/drawingml/2006/main" xmlns:r="http://schemas.openxmlformats.org/officeDocument/2006/relationships" xmlns:p="http://schemas.openxmlformats.org/presentationml/2006/main">
+  <p:cSld>
+    <p:spTree>
+      <p:nvGrpSpPr>
+        <p:cNvPr id="1" name=""/>
+        <p:cNvGrpSpPr/>
+        <p:nvPr/>
+      </p:nvGrpSpPr>
+      <p:grpSpPr>
+        <a:xfrm>
+          <a:off x="0" y="0"/>
+          <a:ext cx="0" cy="0"/>
+          <a:chOff x="0" y="0"/>
+          <a:chExt cx="0" cy="0"/>
+        </a:xfrm>
+      </p:grpSpPr>
+      <p:sp>
+        <p:nvSpPr>
+          <p:cNvPr id="2" name="Title 1">
+            <a:extLst>
+              <a:ext uri="{FF2B5EF4-FFF2-40B4-BE49-F238E27FC236}">
+                <a16:creationId xmlns:a16="http://schemas.microsoft.com/office/drawing/2014/main" id="{773CBFCD-4012-DBBB-8B48-54FE5B8F734F}"/>
+              </a:ext>
+            </a:extLst>
+          </p:cNvPr>
+          <p:cNvSpPr>
+            <a:spLocks noGrp="1"/>
+          </p:cNvSpPr>
+          <p:nvPr>
+            <p:ph type="title"/>
+          </p:nvPr>
+        </p:nvSpPr>
+        <p:spPr/>
+        <p:txBody>
+          <a:bodyPr/>
+          <a:lstStyle/>
+          <a:p>
+            <a:r>
+              <a:rPr lang="en-US" dirty="0"/>
+              <a:t>Introduce Research Question </a:t>
+            </a:r>
+          </a:p>
+        </p:txBody>
+      </p:sp>
+      <p:sp>
+        <p:nvSpPr>
+          <p:cNvPr id="3" name="Content Placeholder 2">
+            <a:extLst>
+              <a:ext uri="{FF2B5EF4-FFF2-40B4-BE49-F238E27FC236}">
+                <a16:creationId xmlns:a16="http://schemas.microsoft.com/office/drawing/2014/main" id="{D821BD2F-CAF7-C0AC-FAC7-7C51F06A93C3}"/>
+              </a:ext>
+            </a:extLst>
+          </p:cNvPr>
+          <p:cNvSpPr>
+            <a:spLocks noGrp="1"/>
+          </p:cNvSpPr>
+          <p:nvPr>
+            <p:ph idx="1"/>
+          </p:nvPr>
+        </p:nvSpPr>
+        <p:spPr/>
+        <p:txBody>
+          <a:bodyPr>
+            <a:normAutofit/>
+          </a:bodyPr>
+          <a:lstStyle/>
+          <a:p>
+            <a:r>
+              <a:rPr lang="en-US" b="1" dirty="0">
+                <a:solidFill>
+                  <a:srgbClr val="002060"/>
+                </a:solidFill>
+              </a:rPr>
+              <a:t>Start with: </a:t>
+            </a:r>
+            <a:r>
+              <a:rPr lang="en-US" dirty="0"/>
+              <a:t>stating problem resulting results from </a:t>
+            </a:r>
+            <a:r>
+              <a:rPr lang="en-US" b="1" dirty="0"/>
+              <a:t>identified gap, limitation or shortcoming from research on topic introduced</a:t>
+            </a:r>
+            <a:r>
+              <a:rPr lang="en-US" b="1" baseline="30000" dirty="0"/>
+              <a:t>2</a:t>
+            </a:r>
+            <a:r>
+              <a:rPr lang="en-US" b="1" dirty="0"/>
+              <a:t> </a:t>
+            </a:r>
+          </a:p>
+          <a:p>
+            <a:r>
+              <a:rPr lang="en-US" dirty="0"/>
+              <a:t>Problem</a:t>
+            </a:r>
+            <a:r>
+              <a:rPr lang="en-US" b="1" dirty="0"/>
+              <a:t> </a:t>
+            </a:r>
+            <a:r>
+              <a:rPr lang="en-US" dirty="0"/>
+              <a:t>has two components</a:t>
+            </a:r>
+            <a:r>
+              <a:rPr lang="en-US" b="1" dirty="0"/>
+              <a:t>: </a:t>
+            </a:r>
+            <a:r>
+              <a:rPr lang="en-US" dirty="0"/>
+              <a:t>description on condition and consequences. </a:t>
+            </a:r>
+          </a:p>
+          <a:p>
+            <a:pPr lvl="1"/>
+            <a:r>
+              <a:rPr lang="en-US" dirty="0"/>
+              <a:t>Condition: helps to establish niche research area of research question in which you’re your research study is situated and context of incomplete knowledge</a:t>
+            </a:r>
+            <a:r>
+              <a:rPr lang="en-US" baseline="30000" dirty="0"/>
+              <a:t>3</a:t>
+            </a:r>
+            <a:endParaRPr lang="en-US" dirty="0"/>
+          </a:p>
+          <a:p>
+            <a:pPr lvl="1"/>
+            <a:r>
+              <a:rPr lang="en-US" dirty="0"/>
+              <a:t>Consequences: answers and addresses consequence of limited knowledge and supports need for further research</a:t>
+            </a:r>
+            <a:r>
+              <a:rPr lang="en-US" baseline="30000" dirty="0"/>
+              <a:t>3</a:t>
+            </a:r>
+            <a:endParaRPr lang="en-US" dirty="0"/>
+          </a:p>
+        </p:txBody>
+      </p:sp>
+    </p:spTree>
+    <p:extLst>
+      <p:ext uri="{BB962C8B-B14F-4D97-AF65-F5344CB8AC3E}">
+        <p14:creationId xmlns:p14="http://schemas.microsoft.com/office/powerpoint/2010/main" val="1903240771"/>
+      </p:ext>
+    </p:extLst>
+  </p:cSld>
+  <p:clrMapOvr>
+    <a:masterClrMapping/>
+  </p:clrMapOvr>
+</p:sld>
+</file>
+
+<file path=ppt/slides/slide9.xml><?xml version="1.0" encoding="utf-8"?>
+<p:sld xmlns:a="http://schemas.openxmlformats.org/drawingml/2006/main" xmlns:r="http://schemas.openxmlformats.org/officeDocument/2006/relationships" xmlns:p="http://schemas.openxmlformats.org/presentationml/2006/main">
+  <p:cSld>
+    <p:spTree>
+      <p:nvGrpSpPr>
+        <p:cNvPr id="1" name="">
+          <a:extLst>
+            <a:ext uri="{FF2B5EF4-FFF2-40B4-BE49-F238E27FC236}">
+              <a16:creationId xmlns:a16="http://schemas.microsoft.com/office/drawing/2014/main" id="{88B06C26-7195-CAED-455D-FE809095E122}"/>
+            </a:ext>
+          </a:extLst>
+        </p:cNvPr>
+        <p:cNvGrpSpPr/>
+        <p:nvPr/>
+      </p:nvGrpSpPr>
+      <p:grpSpPr>
+        <a:xfrm>
+          <a:off x="0" y="0"/>
+          <a:ext cx="0" cy="0"/>
+          <a:chOff x="0" y="0"/>
+          <a:chExt cx="0" cy="0"/>
+        </a:xfrm>
+      </p:grpSpPr>
+      <p:sp>
+        <p:nvSpPr>
+          <p:cNvPr id="2" name="Title 1">
+            <a:extLst>
+              <a:ext uri="{FF2B5EF4-FFF2-40B4-BE49-F238E27FC236}">
+                <a16:creationId xmlns:a16="http://schemas.microsoft.com/office/drawing/2014/main" id="{1F4BCCBA-EBE5-E6F0-BC9C-5B4078B8EC86}"/>
+              </a:ext>
+            </a:extLst>
+          </p:cNvPr>
+          <p:cNvSpPr>
+            <a:spLocks noGrp="1"/>
+          </p:cNvSpPr>
+          <p:nvPr>
+            <p:ph type="title"/>
+          </p:nvPr>
+        </p:nvSpPr>
+        <p:spPr/>
+        <p:txBody>
+          <a:bodyPr/>
+          <a:lstStyle/>
+          <a:p>
+            <a:r>
+              <a:rPr lang="en-US" dirty="0"/>
+              <a:t>Introduce Research Question </a:t>
+            </a:r>
+          </a:p>
+        </p:txBody>
+      </p:sp>
+      <p:sp>
+        <p:nvSpPr>
+          <p:cNvPr id="3" name="Content Placeholder 2">
+            <a:extLst>
+              <a:ext uri="{FF2B5EF4-FFF2-40B4-BE49-F238E27FC236}">
+                <a16:creationId xmlns:a16="http://schemas.microsoft.com/office/drawing/2014/main" id="{A0DE1C25-4DD8-375E-01B2-F953D2FA949C}"/>
+              </a:ext>
+            </a:extLst>
+          </p:cNvPr>
+          <p:cNvSpPr>
+            <a:spLocks noGrp="1"/>
+          </p:cNvSpPr>
+          <p:nvPr>
+            <p:ph idx="1"/>
+          </p:nvPr>
+        </p:nvSpPr>
+        <p:spPr/>
+        <p:txBody>
+          <a:bodyPr>
+            <a:normAutofit/>
+          </a:bodyPr>
+          <a:lstStyle/>
+          <a:p>
+            <a:r>
+              <a:rPr lang="en-US" b="1" dirty="0">
+                <a:solidFill>
+                  <a:srgbClr val="002060"/>
+                </a:solidFill>
+              </a:rPr>
+              <a:t>Transition into: </a:t>
+            </a:r>
+            <a:r>
+              <a:rPr lang="en-US" dirty="0"/>
+              <a:t>elaboration on condition and consequences elements of problem raised with existing literature related to the problem</a:t>
+            </a:r>
+            <a:r>
+              <a:rPr lang="en-US" baseline="30000" dirty="0"/>
+              <a:t>2</a:t>
+            </a:r>
+            <a:r>
+              <a:rPr lang="en-US" dirty="0"/>
+              <a:t> </a:t>
+            </a:r>
+          </a:p>
+          <a:p>
+            <a:pPr lvl="1"/>
+            <a:r>
+              <a:rPr lang="en-US" sz="1800" b="1" dirty="0"/>
+              <a:t>Do: </a:t>
+            </a:r>
+            <a:r>
+              <a:rPr lang="en-US" sz="1800" dirty="0"/>
+              <a:t>survey existing literature and incorporate supporting findings as well as highlight limitations or gaps of existing literature</a:t>
+            </a:r>
+            <a:r>
+              <a:rPr lang="en-US" sz="1800" baseline="30000" dirty="0"/>
+              <a:t>3</a:t>
+            </a:r>
+            <a:r>
+              <a:rPr lang="en-US" sz="1800" dirty="0"/>
+              <a:t> </a:t>
+            </a:r>
+          </a:p>
+          <a:p>
+            <a:pPr lvl="1"/>
+            <a:r>
+              <a:rPr lang="en-US" sz="1800" b="1" dirty="0"/>
+              <a:t>Do not: </a:t>
+            </a:r>
+            <a:r>
+              <a:rPr lang="en-US" sz="1800" dirty="0"/>
+              <a:t>try to incorporate every existing study and finding, or incorporate findings that distract from elements of research scope</a:t>
+            </a:r>
+            <a:r>
+              <a:rPr lang="en-US" sz="1800" baseline="30000" dirty="0"/>
+              <a:t>3</a:t>
+            </a:r>
+            <a:r>
+              <a:rPr lang="en-US" sz="1800" dirty="0"/>
+              <a:t> </a:t>
+            </a:r>
+          </a:p>
+          <a:p>
+            <a:r>
+              <a:rPr lang="en-US" sz="2000" dirty="0"/>
+              <a:t>Aim to conclude with description of knowledge gap to support final section introducing research scope</a:t>
+            </a:r>
+          </a:p>
+        </p:txBody>
+      </p:sp>
+    </p:spTree>
+    <p:extLst>
+      <p:ext uri="{BB962C8B-B14F-4D97-AF65-F5344CB8AC3E}">
+        <p14:creationId xmlns:p14="http://schemas.microsoft.com/office/powerpoint/2010/main" val="3435144888"/>
       </p:ext>
     </p:extLst>
   </p:cSld>
@@ -5732,4 +6150,319 @@
     </a:ext>
   </a:extLst>
 </a:theme>
+</file>
+
+<file path=ppt/theme/theme2.xml><?xml version="1.0" encoding="utf-8"?>
+<a:theme xmlns:a="http://schemas.openxmlformats.org/drawingml/2006/main" name="Office Theme">
+  <a:themeElements>
+    <a:clrScheme name="Office">
+      <a:dk1>
+        <a:sysClr val="windowText" lastClr="000000"/>
+      </a:dk1>
+      <a:lt1>
+        <a:sysClr val="window" lastClr="FFFFFF"/>
+      </a:lt1>
+      <a:dk2>
+        <a:srgbClr val="0E2841"/>
+      </a:dk2>
+      <a:lt2>
+        <a:srgbClr val="E8E8E8"/>
+      </a:lt2>
+      <a:accent1>
+        <a:srgbClr val="156082"/>
+      </a:accent1>
+      <a:accent2>
+        <a:srgbClr val="E97132"/>
+      </a:accent2>
+      <a:accent3>
+        <a:srgbClr val="196B24"/>
+      </a:accent3>
+      <a:accent4>
+        <a:srgbClr val="0F9ED5"/>
+      </a:accent4>
+      <a:accent5>
+        <a:srgbClr val="A02B93"/>
+      </a:accent5>
+      <a:accent6>
+        <a:srgbClr val="4EA72E"/>
+      </a:accent6>
+      <a:hlink>
+        <a:srgbClr val="467886"/>
+      </a:hlink>
+      <a:folHlink>
+        <a:srgbClr val="96607D"/>
+      </a:folHlink>
+    </a:clrScheme>
+    <a:fontScheme name="Office">
+      <a:majorFont>
+        <a:latin typeface="Aptos Display" panose="02110004020202020204"/>
+        <a:ea typeface=""/>
+        <a:cs typeface=""/>
+        <a:font script="Jpan" typeface="游ゴシック Light"/>
+        <a:font script="Hang" typeface="맑은 고딕"/>
+        <a:font script="Hans" typeface="等线 Light"/>
+        <a:font script="Hant" typeface="新細明體"/>
+        <a:font script="Arab" typeface="Times New Roman"/>
+        <a:font script="Hebr" typeface="Times New Roman"/>
+        <a:font script="Thai" typeface="Angsana New"/>
+        <a:font script="Ethi" typeface="Nyala"/>
+        <a:font script="Beng" typeface="Vrinda"/>
+        <a:font script="Gujr" typeface="Shruti"/>
+        <a:font script="Khmr" typeface="MoolBoran"/>
+        <a:font script="Knda" typeface="Tunga"/>
+        <a:font script="Guru" typeface="Raavi"/>
+        <a:font script="Cans" typeface="Euphemia"/>
+        <a:font script="Cher" typeface="Plantagenet Cherokee"/>
+        <a:font script="Yiii" typeface="Microsoft Yi Baiti"/>
+        <a:font script="Tibt" typeface="Microsoft Himalaya"/>
+        <a:font script="Thaa" typeface="MV Boli"/>
+        <a:font script="Deva" typeface="Mangal"/>
+        <a:font script="Telu" typeface="Gautami"/>
+        <a:font script="Taml" typeface="Latha"/>
+        <a:font script="Syrc" typeface="Estrangelo Edessa"/>
+        <a:font script="Orya" typeface="Kalinga"/>
+        <a:font script="Mlym" typeface="Kartika"/>
+        <a:font script="Laoo" typeface="DokChampa"/>
+        <a:font script="Sinh" typeface="Iskoola Pota"/>
+        <a:font script="Mong" typeface="Mongolian Baiti"/>
+        <a:font script="Viet" typeface="Times New Roman"/>
+        <a:font script="Uigh" typeface="Microsoft Uighur"/>
+        <a:font script="Geor" typeface="Sylfaen"/>
+        <a:font script="Armn" typeface="Arial"/>
+        <a:font script="Bugi" typeface="Leelawadee UI"/>
+        <a:font script="Bopo" typeface="Microsoft JhengHei"/>
+        <a:font script="Java" typeface="Javanese Text"/>
+        <a:font script="Lisu" typeface="Segoe UI"/>
+        <a:font script="Mymr" typeface="Myanmar Text"/>
+        <a:font script="Nkoo" typeface="Ebrima"/>
+        <a:font script="Olck" typeface="Nirmala UI"/>
+        <a:font script="Osma" typeface="Ebrima"/>
+        <a:font script="Phag" typeface="Phagspa"/>
+        <a:font script="Syrn" typeface="Estrangelo Edessa"/>
+        <a:font script="Syrj" typeface="Estrangelo Edessa"/>
+        <a:font script="Syre" typeface="Estrangelo Edessa"/>
+        <a:font script="Sora" typeface="Nirmala UI"/>
+        <a:font script="Tale" typeface="Microsoft Tai Le"/>
+        <a:font script="Talu" typeface="Microsoft New Tai Lue"/>
+        <a:font script="Tfng" typeface="Ebrima"/>
+      </a:majorFont>
+      <a:minorFont>
+        <a:latin typeface="Aptos" panose="02110004020202020204"/>
+        <a:ea typeface=""/>
+        <a:cs typeface=""/>
+        <a:font script="Jpan" typeface="游ゴシック"/>
+        <a:font script="Hang" typeface="맑은 고딕"/>
+        <a:font script="Hans" typeface="等线"/>
+        <a:font script="Hant" typeface="新細明體"/>
+        <a:font script="Arab" typeface="Arial"/>
+        <a:font script="Hebr" typeface="Arial"/>
+        <a:font script="Thai" typeface="Cordia New"/>
+        <a:font script="Ethi" typeface="Nyala"/>
+        <a:font script="Beng" typeface="Vrinda"/>
+        <a:font script="Gujr" typeface="Shruti"/>
+        <a:font script="Khmr" typeface="DaunPenh"/>
+        <a:font script="Knda" typeface="Tunga"/>
+        <a:font script="Guru" typeface="Raavi"/>
+        <a:font script="Cans" typeface="Euphemia"/>
+        <a:font script="Cher" typeface="Plantagenet Cherokee"/>
+        <a:font script="Yiii" typeface="Microsoft Yi Baiti"/>
+        <a:font script="Tibt" typeface="Microsoft Himalaya"/>
+        <a:font script="Thaa" typeface="MV Boli"/>
+        <a:font script="Deva" typeface="Mangal"/>
+        <a:font script="Telu" typeface="Gautami"/>
+        <a:font script="Taml" typeface="Latha"/>
+        <a:font script="Syrc" typeface="Estrangelo Edessa"/>
+        <a:font script="Orya" typeface="Kalinga"/>
+        <a:font script="Mlym" typeface="Kartika"/>
+        <a:font script="Laoo" typeface="DokChampa"/>
+        <a:font script="Sinh" typeface="Iskoola Pota"/>
+        <a:font script="Mong" typeface="Mongolian Baiti"/>
+        <a:font script="Viet" typeface="Arial"/>
+        <a:font script="Uigh" typeface="Microsoft Uighur"/>
+        <a:font script="Geor" typeface="Sylfaen"/>
+        <a:font script="Armn" typeface="Arial"/>
+        <a:font script="Bugi" typeface="Leelawadee UI"/>
+        <a:font script="Bopo" typeface="Microsoft JhengHei"/>
+        <a:font script="Java" typeface="Javanese Text"/>
+        <a:font script="Lisu" typeface="Segoe UI"/>
+        <a:font script="Mymr" typeface="Myanmar Text"/>
+        <a:font script="Nkoo" typeface="Ebrima"/>
+        <a:font script="Olck" typeface="Nirmala UI"/>
+        <a:font script="Osma" typeface="Ebrima"/>
+        <a:font script="Phag" typeface="Phagspa"/>
+        <a:font script="Syrn" typeface="Estrangelo Edessa"/>
+        <a:font script="Syrj" typeface="Estrangelo Edessa"/>
+        <a:font script="Syre" typeface="Estrangelo Edessa"/>
+        <a:font script="Sora" typeface="Nirmala UI"/>
+        <a:font script="Tale" typeface="Microsoft Tai Le"/>
+        <a:font script="Talu" typeface="Microsoft New Tai Lue"/>
+        <a:font script="Tfng" typeface="Ebrima"/>
+      </a:minorFont>
+    </a:fontScheme>
+    <a:fmtScheme name="Office">
+      <a:fillStyleLst>
+        <a:solidFill>
+          <a:schemeClr val="phClr"/>
+        </a:solidFill>
+        <a:gradFill rotWithShape="1">
+          <a:gsLst>
+            <a:gs pos="0">
+              <a:schemeClr val="phClr">
+                <a:lumMod val="110000"/>
+                <a:satMod val="105000"/>
+                <a:tint val="67000"/>
+              </a:schemeClr>
+            </a:gs>
+            <a:gs pos="50000">
+              <a:schemeClr val="phClr">
+                <a:lumMod val="105000"/>
+                <a:satMod val="103000"/>
+                <a:tint val="73000"/>
+              </a:schemeClr>
+            </a:gs>
+            <a:gs pos="100000">
+              <a:schemeClr val="phClr">
+                <a:lumMod val="105000"/>
+                <a:satMod val="109000"/>
+                <a:tint val="81000"/>
+              </a:schemeClr>
+            </a:gs>
+          </a:gsLst>
+          <a:lin ang="5400000" scaled="0"/>
+        </a:gradFill>
+        <a:gradFill rotWithShape="1">
+          <a:gsLst>
+            <a:gs pos="0">
+              <a:schemeClr val="phClr">
+                <a:satMod val="103000"/>
+                <a:lumMod val="102000"/>
+                <a:tint val="94000"/>
+              </a:schemeClr>
+            </a:gs>
+            <a:gs pos="50000">
+              <a:schemeClr val="phClr">
+                <a:satMod val="110000"/>
+                <a:lumMod val="100000"/>
+                <a:shade val="100000"/>
+              </a:schemeClr>
+            </a:gs>
+            <a:gs pos="100000">
+              <a:schemeClr val="phClr">
+                <a:lumMod val="99000"/>
+                <a:satMod val="120000"/>
+                <a:shade val="78000"/>
+              </a:schemeClr>
+            </a:gs>
+          </a:gsLst>
+          <a:lin ang="5400000" scaled="0"/>
+        </a:gradFill>
+      </a:fillStyleLst>
+      <a:lnStyleLst>
+        <a:ln w="12700" cap="flat" cmpd="sng" algn="ctr">
+          <a:solidFill>
+            <a:schemeClr val="phClr"/>
+          </a:solidFill>
+          <a:prstDash val="solid"/>
+          <a:miter lim="800000"/>
+        </a:ln>
+        <a:ln w="19050" cap="flat" cmpd="sng" algn="ctr">
+          <a:solidFill>
+            <a:schemeClr val="phClr"/>
+          </a:solidFill>
+          <a:prstDash val="solid"/>
+          <a:miter lim="800000"/>
+        </a:ln>
+        <a:ln w="25400" cap="flat" cmpd="sng" algn="ctr">
+          <a:solidFill>
+            <a:schemeClr val="phClr"/>
+          </a:solidFill>
+          <a:prstDash val="solid"/>
+          <a:miter lim="800000"/>
+        </a:ln>
+      </a:lnStyleLst>
+      <a:effectStyleLst>
+        <a:effectStyle>
+          <a:effectLst/>
+        </a:effectStyle>
+        <a:effectStyle>
+          <a:effectLst/>
+        </a:effectStyle>
+        <a:effectStyle>
+          <a:effectLst>
+            <a:outerShdw blurRad="57150" dist="19050" dir="5400000" algn="ctr" rotWithShape="0">
+              <a:srgbClr val="000000">
+                <a:alpha val="63000"/>
+              </a:srgbClr>
+            </a:outerShdw>
+          </a:effectLst>
+        </a:effectStyle>
+      </a:effectStyleLst>
+      <a:bgFillStyleLst>
+        <a:solidFill>
+          <a:schemeClr val="phClr"/>
+        </a:solidFill>
+        <a:solidFill>
+          <a:schemeClr val="phClr">
+            <a:tint val="95000"/>
+            <a:satMod val="170000"/>
+          </a:schemeClr>
+        </a:solidFill>
+        <a:gradFill rotWithShape="1">
+          <a:gsLst>
+            <a:gs pos="0">
+              <a:schemeClr val="phClr">
+                <a:tint val="93000"/>
+                <a:satMod val="150000"/>
+                <a:shade val="98000"/>
+                <a:lumMod val="102000"/>
+              </a:schemeClr>
+            </a:gs>
+            <a:gs pos="50000">
+              <a:schemeClr val="phClr">
+                <a:tint val="98000"/>
+                <a:satMod val="130000"/>
+                <a:shade val="90000"/>
+                <a:lumMod val="103000"/>
+              </a:schemeClr>
+            </a:gs>
+            <a:gs pos="100000">
+              <a:schemeClr val="phClr">
+                <a:shade val="63000"/>
+                <a:satMod val="120000"/>
+              </a:schemeClr>
+            </a:gs>
+          </a:gsLst>
+          <a:lin ang="5400000" scaled="0"/>
+        </a:gradFill>
+      </a:bgFillStyleLst>
+    </a:fmtScheme>
+  </a:themeElements>
+  <a:objectDefaults>
+    <a:lnDef>
+      <a:spPr/>
+      <a:bodyPr/>
+      <a:lstStyle/>
+      <a:style>
+        <a:lnRef idx="2">
+          <a:schemeClr val="accent1"/>
+        </a:lnRef>
+        <a:fillRef idx="0">
+          <a:schemeClr val="accent1"/>
+        </a:fillRef>
+        <a:effectRef idx="1">
+          <a:schemeClr val="accent1"/>
+        </a:effectRef>
+        <a:fontRef idx="minor">
+          <a:schemeClr val="tx1"/>
+        </a:fontRef>
+      </a:style>
+    </a:lnDef>
+  </a:objectDefaults>
+  <a:extraClrSchemeLst/>
+  <a:extLst>
+    <a:ext uri="{05A4C25C-085E-4340-85A3-A5531E510DB2}">
+      <thm15:themeFamily xmlns:thm15="http://schemas.microsoft.com/office/thememl/2012/main" name="Office Theme" id="{2E142A2C-CD16-42D6-873A-C26D2A0506FA}" vid="{1BDDFF52-6CD6-40A5-AB3C-68EB2F1E4D0A}"/>
+    </a:ext>
+  </a:extLst>
+</a:theme>
 </file>